--- a/ref/템플릿/Presentation_Template_Blank.pptx
+++ b/ref/템플릿/Presentation_Template_Blank.pptx
@@ -5,7 +5,6 @@
     <p:sldMasterId id="2147483648" r:id="rId1"/>
   </p:sldMasterIdLst>
   <p:sldIdLst>
-    <p:sldId id="256" r:id="rId2"/>
     <p:sldId id="257" r:id="rId3"/>
     <p:sldId id="258" r:id="rId4"/>
     <p:sldId id="259" r:id="rId5"/>
@@ -14,14 +13,11 @@
     <p:sldId id="262" r:id="rId8"/>
     <p:sldId id="263" r:id="rId9"/>
     <p:sldId id="264" r:id="rId10"/>
-    <p:sldId id="265" r:id="rId11"/>
-    <p:sldId id="266" r:id="rId12"/>
     <p:sldId id="267" r:id="rId13"/>
     <p:sldId id="268" r:id="rId14"/>
     <p:sldId id="269" r:id="rId15"/>
     <p:sldId id="270" r:id="rId16"/>
     <p:sldId id="271" r:id="rId17"/>
-    <p:sldId id="272" r:id="rId18"/>
   </p:sldIdLst>
   <p:notesMasterIdLst>
     <p:notesMasterId r:id="rId19"/>
@@ -472,270 +468,6 @@
 </p:notesMaster>
 </file>
 
-<file path=ppt/notesSlides/notesSlide1.xml><?xml version="1.0" encoding="utf-8"?>
-<p:notes xmlns:a="http://schemas.openxmlformats.org/drawingml/2006/main" xmlns:r="http://schemas.openxmlformats.org/officeDocument/2006/relationships" xmlns:p="http://schemas.openxmlformats.org/presentationml/2006/main">
-  <p:cSld>
-    <p:spTree>
-      <p:nvGrpSpPr>
-        <p:cNvPr id="1" name=""/>
-        <p:cNvGrpSpPr/>
-        <p:nvPr/>
-      </p:nvGrpSpPr>
-      <p:grpSpPr>
-        <a:xfrm>
-          <a:off x="0" y="0"/>
-          <a:ext cx="0" cy="0"/>
-          <a:chOff x="0" y="0"/>
-          <a:chExt cx="0" cy="0"/>
-        </a:xfrm>
-      </p:grpSpPr>
-      <p:sp>
-        <p:nvSpPr>
-          <p:cNvPr id="2" name="Slide Image Placeholder 1"/>
-          <p:cNvSpPr>
-            <a:spLocks noGrp="1" noRot="1" noChangeAspect="1"/>
-          </p:cNvSpPr>
-          <p:nvPr>
-            <p:ph type="sldImg"/>
-          </p:nvPr>
-        </p:nvSpPr>
-        <p:spPr/>
-      </p:sp>
-      <p:sp>
-        <p:nvSpPr>
-          <p:cNvPr id="3" name="Notes Placeholder 2"/>
-          <p:cNvSpPr>
-            <a:spLocks noGrp="1"/>
-          </p:cNvSpPr>
-          <p:nvPr>
-            <p:ph type="body" idx="1"/>
-          </p:nvPr>
-        </p:nvSpPr>
-        <p:spPr/>
-        <p:txBody>
-          <a:bodyPr/>
-          <a:lstStyle/>
-          <a:p>
-            <a:r>
-              <a:rPr lang="en-US" dirty="0"/>
-              <a:t/>
-            </a:r>
-            <a:endParaRPr lang="en-US" dirty="0"/>
-          </a:p>
-        </p:txBody>
-      </p:sp>
-      <p:sp>
-        <p:nvSpPr>
-          <p:cNvPr id="4" name="Slide Number Placeholder 3"/>
-          <p:cNvSpPr>
-            <a:spLocks noGrp="1"/>
-          </p:cNvSpPr>
-          <p:nvPr>
-            <p:ph type="sldNum" sz="quarter" idx="10"/>
-          </p:nvPr>
-        </p:nvSpPr>
-        <p:spPr/>
-        <p:txBody>
-          <a:bodyPr/>
-          <a:lstStyle/>
-          <a:p>
-            <a:fld id="{F7021451-1387-4CA6-816F-3879F97B5CBC}" type="slidenum">
-              <a:rPr lang="en-US"/>
-              <a:t>1</a:t>
-            </a:fld>
-            <a:endParaRPr lang="en-US"/>
-          </a:p>
-        </p:txBody>
-      </p:sp>
-    </p:spTree>
-    <p:extLst>
-      <p:ext uri="{BB962C8B-B14F-4D97-AF65-F5344CB8AC3E}">
-        <p14:creationId xmlns:p14="http://schemas.microsoft.com/office/powerpoint/2010/main" val="1024086991"/>
-      </p:ext>
-    </p:extLst>
-  </p:cSld>
-  <p:clrMapOvr>
-    <a:masterClrMapping/>
-  </p:clrMapOvr>
-</p:notes>
-</file>
-
-<file path=ppt/notesSlides/notesSlide10.xml><?xml version="1.0" encoding="utf-8"?>
-<p:notes xmlns:a="http://schemas.openxmlformats.org/drawingml/2006/main" xmlns:r="http://schemas.openxmlformats.org/officeDocument/2006/relationships" xmlns:p="http://schemas.openxmlformats.org/presentationml/2006/main">
-  <p:cSld>
-    <p:spTree>
-      <p:nvGrpSpPr>
-        <p:cNvPr id="1" name=""/>
-        <p:cNvGrpSpPr/>
-        <p:nvPr/>
-      </p:nvGrpSpPr>
-      <p:grpSpPr>
-        <a:xfrm>
-          <a:off x="0" y="0"/>
-          <a:ext cx="0" cy="0"/>
-          <a:chOff x="0" y="0"/>
-          <a:chExt cx="0" cy="0"/>
-        </a:xfrm>
-      </p:grpSpPr>
-      <p:sp>
-        <p:nvSpPr>
-          <p:cNvPr id="2" name="Slide Image Placeholder 1"/>
-          <p:cNvSpPr>
-            <a:spLocks noGrp="1" noRot="1" noChangeAspect="1"/>
-          </p:cNvSpPr>
-          <p:nvPr>
-            <p:ph type="sldImg"/>
-          </p:nvPr>
-        </p:nvSpPr>
-        <p:spPr/>
-      </p:sp>
-      <p:sp>
-        <p:nvSpPr>
-          <p:cNvPr id="3" name="Notes Placeholder 2"/>
-          <p:cNvSpPr>
-            <a:spLocks noGrp="1"/>
-          </p:cNvSpPr>
-          <p:nvPr>
-            <p:ph type="body" idx="1"/>
-          </p:nvPr>
-        </p:nvSpPr>
-        <p:spPr/>
-        <p:txBody>
-          <a:bodyPr/>
-          <a:lstStyle/>
-          <a:p>
-            <a:r>
-              <a:rPr lang="en-US" dirty="0"/>
-              <a:t/>
-            </a:r>
-            <a:endParaRPr lang="en-US" dirty="0"/>
-          </a:p>
-        </p:txBody>
-      </p:sp>
-      <p:sp>
-        <p:nvSpPr>
-          <p:cNvPr id="4" name="Slide Number Placeholder 3"/>
-          <p:cNvSpPr>
-            <a:spLocks noGrp="1"/>
-          </p:cNvSpPr>
-          <p:nvPr>
-            <p:ph type="sldNum" sz="quarter" idx="10"/>
-          </p:nvPr>
-        </p:nvSpPr>
-        <p:spPr/>
-        <p:txBody>
-          <a:bodyPr/>
-          <a:lstStyle/>
-          <a:p>
-            <a:fld id="{F7021451-1387-4CA6-816F-3879F97B5CBC}" type="slidenum">
-              <a:rPr lang="en-US"/>
-              <a:t>10</a:t>
-            </a:fld>
-            <a:endParaRPr lang="en-US"/>
-          </a:p>
-        </p:txBody>
-      </p:sp>
-    </p:spTree>
-    <p:extLst>
-      <p:ext uri="{BB962C8B-B14F-4D97-AF65-F5344CB8AC3E}">
-        <p14:creationId xmlns:p14="http://schemas.microsoft.com/office/powerpoint/2010/main" val="1024086991"/>
-      </p:ext>
-    </p:extLst>
-  </p:cSld>
-  <p:clrMapOvr>
-    <a:masterClrMapping/>
-  </p:clrMapOvr>
-</p:notes>
-</file>
-
-<file path=ppt/notesSlides/notesSlide11.xml><?xml version="1.0" encoding="utf-8"?>
-<p:notes xmlns:a="http://schemas.openxmlformats.org/drawingml/2006/main" xmlns:r="http://schemas.openxmlformats.org/officeDocument/2006/relationships" xmlns:p="http://schemas.openxmlformats.org/presentationml/2006/main">
-  <p:cSld>
-    <p:spTree>
-      <p:nvGrpSpPr>
-        <p:cNvPr id="1" name=""/>
-        <p:cNvGrpSpPr/>
-        <p:nvPr/>
-      </p:nvGrpSpPr>
-      <p:grpSpPr>
-        <a:xfrm>
-          <a:off x="0" y="0"/>
-          <a:ext cx="0" cy="0"/>
-          <a:chOff x="0" y="0"/>
-          <a:chExt cx="0" cy="0"/>
-        </a:xfrm>
-      </p:grpSpPr>
-      <p:sp>
-        <p:nvSpPr>
-          <p:cNvPr id="2" name="Slide Image Placeholder 1"/>
-          <p:cNvSpPr>
-            <a:spLocks noGrp="1" noRot="1" noChangeAspect="1"/>
-          </p:cNvSpPr>
-          <p:nvPr>
-            <p:ph type="sldImg"/>
-          </p:nvPr>
-        </p:nvSpPr>
-        <p:spPr/>
-      </p:sp>
-      <p:sp>
-        <p:nvSpPr>
-          <p:cNvPr id="3" name="Notes Placeholder 2"/>
-          <p:cNvSpPr>
-            <a:spLocks noGrp="1"/>
-          </p:cNvSpPr>
-          <p:nvPr>
-            <p:ph type="body" idx="1"/>
-          </p:nvPr>
-        </p:nvSpPr>
-        <p:spPr/>
-        <p:txBody>
-          <a:bodyPr/>
-          <a:lstStyle/>
-          <a:p>
-            <a:r>
-              <a:rPr lang="en-US" dirty="0"/>
-              <a:t/>
-            </a:r>
-            <a:endParaRPr lang="en-US" dirty="0"/>
-          </a:p>
-        </p:txBody>
-      </p:sp>
-      <p:sp>
-        <p:nvSpPr>
-          <p:cNvPr id="4" name="Slide Number Placeholder 3"/>
-          <p:cNvSpPr>
-            <a:spLocks noGrp="1"/>
-          </p:cNvSpPr>
-          <p:nvPr>
-            <p:ph type="sldNum" sz="quarter" idx="10"/>
-          </p:nvPr>
-        </p:nvSpPr>
-        <p:spPr/>
-        <p:txBody>
-          <a:bodyPr/>
-          <a:lstStyle/>
-          <a:p>
-            <a:fld id="{F7021451-1387-4CA6-816F-3879F97B5CBC}" type="slidenum">
-              <a:rPr lang="en-US"/>
-              <a:t>11</a:t>
-            </a:fld>
-            <a:endParaRPr lang="en-US"/>
-          </a:p>
-        </p:txBody>
-      </p:sp>
-    </p:spTree>
-    <p:extLst>
-      <p:ext uri="{BB962C8B-B14F-4D97-AF65-F5344CB8AC3E}">
-        <p14:creationId xmlns:p14="http://schemas.microsoft.com/office/powerpoint/2010/main" val="1024086991"/>
-      </p:ext>
-    </p:extLst>
-  </p:cSld>
-  <p:clrMapOvr>
-    <a:masterClrMapping/>
-  </p:clrMapOvr>
-</p:notes>
-</file>
-
 <file path=ppt/notesSlides/notesSlide12.xml><?xml version="1.0" encoding="utf-8"?>
 <p:notes xmlns:a="http://schemas.openxmlformats.org/drawingml/2006/main" xmlns:r="http://schemas.openxmlformats.org/officeDocument/2006/relationships" xmlns:p="http://schemas.openxmlformats.org/presentationml/2006/main">
   <p:cSld>
@@ -805,7 +537,7 @@
           <a:p>
             <a:fld id="{F7021451-1387-4CA6-816F-3879F97B5CBC}" type="slidenum">
               <a:rPr lang="en-US"/>
-              <a:t>12</a:t>
+              <a:t>9</a:t>
             </a:fld>
             <a:endParaRPr lang="en-US"/>
           </a:p>
@@ -893,7 +625,7 @@
           <a:p>
             <a:fld id="{F7021451-1387-4CA6-816F-3879F97B5CBC}" type="slidenum">
               <a:rPr lang="en-US"/>
-              <a:t>13</a:t>
+              <a:t>10</a:t>
             </a:fld>
             <a:endParaRPr lang="en-US"/>
           </a:p>
@@ -981,7 +713,7 @@
           <a:p>
             <a:fld id="{F7021451-1387-4CA6-816F-3879F97B5CBC}" type="slidenum">
               <a:rPr lang="en-US"/>
-              <a:t>14</a:t>
+              <a:t>11</a:t>
             </a:fld>
             <a:endParaRPr lang="en-US"/>
           </a:p>
@@ -1069,7 +801,7 @@
           <a:p>
             <a:fld id="{F7021451-1387-4CA6-816F-3879F97B5CBC}" type="slidenum">
               <a:rPr lang="en-US"/>
-              <a:t>15</a:t>
+              <a:t>12</a:t>
             </a:fld>
             <a:endParaRPr lang="en-US"/>
           </a:p>
@@ -1157,95 +889,7 @@
           <a:p>
             <a:fld id="{F7021451-1387-4CA6-816F-3879F97B5CBC}" type="slidenum">
               <a:rPr lang="en-US"/>
-              <a:t>16</a:t>
-            </a:fld>
-            <a:endParaRPr lang="en-US"/>
-          </a:p>
-        </p:txBody>
-      </p:sp>
-    </p:spTree>
-    <p:extLst>
-      <p:ext uri="{BB962C8B-B14F-4D97-AF65-F5344CB8AC3E}">
-        <p14:creationId xmlns:p14="http://schemas.microsoft.com/office/powerpoint/2010/main" val="1024086991"/>
-      </p:ext>
-    </p:extLst>
-  </p:cSld>
-  <p:clrMapOvr>
-    <a:masterClrMapping/>
-  </p:clrMapOvr>
-</p:notes>
-</file>
-
-<file path=ppt/notesSlides/notesSlide17.xml><?xml version="1.0" encoding="utf-8"?>
-<p:notes xmlns:a="http://schemas.openxmlformats.org/drawingml/2006/main" xmlns:r="http://schemas.openxmlformats.org/officeDocument/2006/relationships" xmlns:p="http://schemas.openxmlformats.org/presentationml/2006/main">
-  <p:cSld>
-    <p:spTree>
-      <p:nvGrpSpPr>
-        <p:cNvPr id="1" name=""/>
-        <p:cNvGrpSpPr/>
-        <p:nvPr/>
-      </p:nvGrpSpPr>
-      <p:grpSpPr>
-        <a:xfrm>
-          <a:off x="0" y="0"/>
-          <a:ext cx="0" cy="0"/>
-          <a:chOff x="0" y="0"/>
-          <a:chExt cx="0" cy="0"/>
-        </a:xfrm>
-      </p:grpSpPr>
-      <p:sp>
-        <p:nvSpPr>
-          <p:cNvPr id="2" name="Slide Image Placeholder 1"/>
-          <p:cNvSpPr>
-            <a:spLocks noGrp="1" noRot="1" noChangeAspect="1"/>
-          </p:cNvSpPr>
-          <p:nvPr>
-            <p:ph type="sldImg"/>
-          </p:nvPr>
-        </p:nvSpPr>
-        <p:spPr/>
-      </p:sp>
-      <p:sp>
-        <p:nvSpPr>
-          <p:cNvPr id="3" name="Notes Placeholder 2"/>
-          <p:cNvSpPr>
-            <a:spLocks noGrp="1"/>
-          </p:cNvSpPr>
-          <p:nvPr>
-            <p:ph type="body" idx="1"/>
-          </p:nvPr>
-        </p:nvSpPr>
-        <p:spPr/>
-        <p:txBody>
-          <a:bodyPr/>
-          <a:lstStyle/>
-          <a:p>
-            <a:r>
-              <a:rPr lang="en-US" dirty="0"/>
-              <a:t/>
-            </a:r>
-            <a:endParaRPr lang="en-US" dirty="0"/>
-          </a:p>
-        </p:txBody>
-      </p:sp>
-      <p:sp>
-        <p:nvSpPr>
-          <p:cNvPr id="4" name="Slide Number Placeholder 3"/>
-          <p:cNvSpPr>
-            <a:spLocks noGrp="1"/>
-          </p:cNvSpPr>
-          <p:nvPr>
-            <p:ph type="sldNum" sz="quarter" idx="10"/>
-          </p:nvPr>
-        </p:nvSpPr>
-        <p:spPr/>
-        <p:txBody>
-          <a:bodyPr/>
-          <a:lstStyle/>
-          <a:p>
-            <a:fld id="{F7021451-1387-4CA6-816F-3879F97B5CBC}" type="slidenum">
-              <a:rPr lang="en-US"/>
-              <a:t>17</a:t>
+              <a:t>13</a:t>
             </a:fld>
             <a:endParaRPr lang="en-US"/>
           </a:p>
@@ -1333,7 +977,7 @@
           <a:p>
             <a:fld id="{F7021451-1387-4CA6-816F-3879F97B5CBC}" type="slidenum">
               <a:rPr lang="en-US"/>
-              <a:t>2</a:t>
+              <a:t>1</a:t>
             </a:fld>
             <a:endParaRPr lang="en-US"/>
           </a:p>
@@ -1421,7 +1065,7 @@
           <a:p>
             <a:fld id="{F7021451-1387-4CA6-816F-3879F97B5CBC}" type="slidenum">
               <a:rPr lang="en-US"/>
-              <a:t>3</a:t>
+              <a:t>2</a:t>
             </a:fld>
             <a:endParaRPr lang="en-US"/>
           </a:p>
@@ -1509,7 +1153,7 @@
           <a:p>
             <a:fld id="{F7021451-1387-4CA6-816F-3879F97B5CBC}" type="slidenum">
               <a:rPr lang="en-US"/>
-              <a:t>4</a:t>
+              <a:t>3</a:t>
             </a:fld>
             <a:endParaRPr lang="en-US"/>
           </a:p>
@@ -1597,7 +1241,7 @@
           <a:p>
             <a:fld id="{F7021451-1387-4CA6-816F-3879F97B5CBC}" type="slidenum">
               <a:rPr lang="en-US"/>
-              <a:t>5</a:t>
+              <a:t>4</a:t>
             </a:fld>
             <a:endParaRPr lang="en-US"/>
           </a:p>
@@ -1685,7 +1329,7 @@
           <a:p>
             <a:fld id="{F7021451-1387-4CA6-816F-3879F97B5CBC}" type="slidenum">
               <a:rPr lang="en-US"/>
-              <a:t>6</a:t>
+              <a:t>5</a:t>
             </a:fld>
             <a:endParaRPr lang="en-US"/>
           </a:p>
@@ -1773,7 +1417,7 @@
           <a:p>
             <a:fld id="{F7021451-1387-4CA6-816F-3879F97B5CBC}" type="slidenum">
               <a:rPr lang="en-US"/>
-              <a:t>7</a:t>
+              <a:t>6</a:t>
             </a:fld>
             <a:endParaRPr lang="en-US"/>
           </a:p>
@@ -1861,7 +1505,7 @@
           <a:p>
             <a:fld id="{F7021451-1387-4CA6-816F-3879F97B5CBC}" type="slidenum">
               <a:rPr lang="en-US"/>
-              <a:t>8</a:t>
+              <a:t>7</a:t>
             </a:fld>
             <a:endParaRPr lang="en-US"/>
           </a:p>
@@ -1949,7 +1593,7 @@
           <a:p>
             <a:fld id="{F7021451-1387-4CA6-816F-3879F97B5CBC}" type="slidenum">
               <a:rPr lang="en-US"/>
-              <a:t>9</a:t>
+              <a:t>8</a:t>
             </a:fld>
             <a:endParaRPr lang="en-US"/>
           </a:p>
@@ -2275,3710 +1919,6 @@
 </p:sldMaster>
 </file>
 
-<file path=ppt/slides/slide1.xml><?xml version="1.0" encoding="utf-8"?>
-<p:sld xmlns:a="http://schemas.openxmlformats.org/drawingml/2006/main" xmlns:r="http://schemas.openxmlformats.org/officeDocument/2006/relationships" xmlns:p="http://schemas.openxmlformats.org/presentationml/2006/main">
-  <p:cSld name="Slide 1">
-    <p:bg>
-      <p:bgPr>
-        <a:solidFill>
-          <a:srgbClr val="FFFFFF"/>
-        </a:solidFill>
-      </p:bgPr>
-    </p:bg>
-    <p:spTree>
-      <p:nvGrpSpPr>
-        <p:cNvPr id="1" name=""/>
-        <p:cNvGrpSpPr/>
-        <p:nvPr/>
-      </p:nvGrpSpPr>
-      <p:grpSpPr>
-        <a:xfrm>
-          <a:off x="0" y="0"/>
-          <a:ext cx="0" cy="0"/>
-          <a:chOff x="0" y="0"/>
-          <a:chExt cx="0" cy="0"/>
-        </a:xfrm>
-      </p:grpSpPr>
-      <p:sp>
-        <p:nvSpPr>
-          <p:cNvPr id="2" name="Shape 0"/>
-          <p:cNvSpPr/>
-          <p:nvPr/>
-        </p:nvSpPr>
-        <p:spPr>
-          <a:xfrm>
-            <a:off x="0" y="0"/>
-            <a:ext cx="2651760" cy="3429000"/>
-          </a:xfrm>
-          <a:prstGeom prst="rect">
-            <a:avLst/>
-          </a:prstGeom>
-          <a:solidFill>
-            <a:srgbClr val="1E2C4F"/>
-          </a:solidFill>
-          <a:ln w="12700">
-            <a:solidFill>
-              <a:srgbClr val="1E2C4F"/>
-            </a:solidFill>
-            <a:prstDash val="solid"/>
-          </a:ln>
-        </p:spPr>
-      </p:sp>
-      <p:sp>
-        <p:nvSpPr>
-          <p:cNvPr id="3" name="Shape 1"/>
-          <p:cNvSpPr/>
-          <p:nvPr/>
-        </p:nvSpPr>
-        <p:spPr>
-          <a:xfrm>
-            <a:off x="5831738" y="0"/>
-            <a:ext cx="0" cy="6858000"/>
-          </a:xfrm>
-          <a:prstGeom prst="line">
-            <a:avLst/>
-          </a:prstGeom>
-          <a:noFill/>
-          <a:ln w="7620">
-            <a:solidFill>
-              <a:srgbClr val="D2D9E5"/>
-            </a:solidFill>
-            <a:prstDash val="solid"/>
-          </a:ln>
-        </p:spPr>
-      </p:sp>
-      <p:sp>
-        <p:nvSpPr>
-          <p:cNvPr id="4" name="Shape 2"/>
-          <p:cNvSpPr/>
-          <p:nvPr/>
-        </p:nvSpPr>
-        <p:spPr>
-          <a:xfrm>
-            <a:off x="9011717" y="0"/>
-            <a:ext cx="0" cy="6858000"/>
-          </a:xfrm>
-          <a:prstGeom prst="line">
-            <a:avLst/>
-          </a:prstGeom>
-          <a:noFill/>
-          <a:ln w="7620">
-            <a:solidFill>
-              <a:srgbClr val="D2D9E5"/>
-            </a:solidFill>
-            <a:prstDash val="solid"/>
-          </a:ln>
-        </p:spPr>
-      </p:sp>
-      <p:sp>
-        <p:nvSpPr>
-          <p:cNvPr id="5" name="Shape 3"/>
-          <p:cNvSpPr/>
-          <p:nvPr/>
-        </p:nvSpPr>
-        <p:spPr>
-          <a:xfrm>
-            <a:off x="2651760" y="3429000"/>
-            <a:ext cx="0" cy="3429000"/>
-          </a:xfrm>
-          <a:prstGeom prst="line">
-            <a:avLst/>
-          </a:prstGeom>
-          <a:noFill/>
-          <a:ln w="7620">
-            <a:solidFill>
-              <a:srgbClr val="D2D9E5"/>
-            </a:solidFill>
-            <a:prstDash val="solid"/>
-          </a:ln>
-        </p:spPr>
-      </p:sp>
-      <p:sp>
-        <p:nvSpPr>
-          <p:cNvPr id="6" name="Shape 4"/>
-          <p:cNvSpPr/>
-          <p:nvPr/>
-        </p:nvSpPr>
-        <p:spPr>
-          <a:xfrm>
-            <a:off x="2651760" y="1371600"/>
-            <a:ext cx="9539935" cy="0"/>
-          </a:xfrm>
-          <a:prstGeom prst="line">
-            <a:avLst/>
-          </a:prstGeom>
-          <a:noFill/>
-          <a:ln w="7620">
-            <a:solidFill>
-              <a:srgbClr val="D2D9E5"/>
-            </a:solidFill>
-            <a:prstDash val="sysDash"/>
-          </a:ln>
-        </p:spPr>
-      </p:sp>
-      <p:sp>
-        <p:nvSpPr>
-          <p:cNvPr id="7" name="Shape 5"/>
-          <p:cNvSpPr/>
-          <p:nvPr/>
-        </p:nvSpPr>
-        <p:spPr>
-          <a:xfrm>
-            <a:off x="2651760" y="2743200"/>
-            <a:ext cx="9539935" cy="0"/>
-          </a:xfrm>
-          <a:prstGeom prst="line">
-            <a:avLst/>
-          </a:prstGeom>
-          <a:noFill/>
-          <a:ln w="7620">
-            <a:solidFill>
-              <a:srgbClr val="D2D9E5"/>
-            </a:solidFill>
-            <a:prstDash val="sysDash"/>
-          </a:ln>
-        </p:spPr>
-      </p:sp>
-      <p:sp>
-        <p:nvSpPr>
-          <p:cNvPr id="8" name="Shape 6"/>
-          <p:cNvSpPr/>
-          <p:nvPr/>
-        </p:nvSpPr>
-        <p:spPr>
-          <a:xfrm>
-            <a:off x="2651760" y="4114800"/>
-            <a:ext cx="9539935" cy="0"/>
-          </a:xfrm>
-          <a:prstGeom prst="line">
-            <a:avLst/>
-          </a:prstGeom>
-          <a:noFill/>
-          <a:ln w="7620">
-            <a:solidFill>
-              <a:srgbClr val="D2D9E5"/>
-            </a:solidFill>
-            <a:prstDash val="sysDash"/>
-          </a:ln>
-        </p:spPr>
-      </p:sp>
-      <p:sp>
-        <p:nvSpPr>
-          <p:cNvPr id="9" name="Shape 7"/>
-          <p:cNvSpPr/>
-          <p:nvPr/>
-        </p:nvSpPr>
-        <p:spPr>
-          <a:xfrm>
-            <a:off x="2651760" y="5486400"/>
-            <a:ext cx="9539935" cy="0"/>
-          </a:xfrm>
-          <a:prstGeom prst="line">
-            <a:avLst/>
-          </a:prstGeom>
-          <a:noFill/>
-          <a:ln w="7620">
-            <a:solidFill>
-              <a:srgbClr val="D2D9E5"/>
-            </a:solidFill>
-            <a:prstDash val="sysDash"/>
-          </a:ln>
-        </p:spPr>
-      </p:sp>
-      <p:sp>
-        <p:nvSpPr>
-          <p:cNvPr id="10" name="Text 8"/>
-          <p:cNvSpPr txBox="1"/>
-          <p:nvPr/>
-        </p:nvSpPr>
-        <p:spPr>
-          <a:xfrm>
-            <a:off x="2816352" y="91440"/>
-            <a:ext cx="1748988" cy="384048"/>
-          </a:xfrm>
-          <a:prstGeom prst="rect">
-            <a:avLst/>
-          </a:prstGeom>
-          <a:noFill/>
-          <a:ln/>
-        </p:spPr>
-        <p:txBody>
-          <a:bodyPr wrap="square" lIns="0" tIns="0" rIns="0" bIns="0" rtlCol="0" anchor="ctr"/>
-          <a:lstStyle/>
-          <a:p>
-            <a:pPr indent="0" marL="0">
-              <a:lnSpc>
-                <a:spcPct val="115000"/>
-              </a:lnSpc>
-              <a:buNone/>
-            </a:pPr>
-            <a:r>
-              <a:rPr lang="en-US" sz="800" dirty="0">
-                <a:solidFill>
-                  <a:srgbClr val="1B2740"/>
-                </a:solidFill>
-                <a:latin typeface="Malgun Gothic" pitchFamily="34" charset="0"/>
-                <a:ea typeface="Malgun Gothic" pitchFamily="34" charset="-122"/>
-                <a:cs typeface="Malgun Gothic" pitchFamily="34" charset="-120"/>
-              </a:rPr>
-              <a:t>List</a:t>
-            </a:r>
-            <a:endParaRPr lang="en-US" sz="800" dirty="0"/>
-          </a:p>
-        </p:txBody>
-      </p:sp>
-      <p:pic>
-        <p:nvPicPr>
-          <p:cNvPr id="11" name="Image 0" descr="preencoded.png">    </p:cNvPr>
-          <p:cNvPicPr>
-            <a:picLocks noChangeAspect="1"/>
-          </p:cNvPicPr>
-          <p:nvPr/>
-        </p:nvPicPr>
-        <p:blipFill>
-          <a:blip r:embed="rId1"/>
-          <a:stretch>
-            <a:fillRect/>
-          </a:stretch>
-        </p:blipFill>
-        <p:spPr>
-          <a:xfrm>
-            <a:off x="4448794" y="384048"/>
-            <a:ext cx="603504" cy="603504"/>
-          </a:xfrm>
-          <a:prstGeom prst="rect">
-            <a:avLst/>
-          </a:prstGeom>
-        </p:spPr>
-      </p:pic>
-      <p:sp>
-        <p:nvSpPr>
-          <p:cNvPr id="12" name="Text 9"/>
-          <p:cNvSpPr txBox="1"/>
-          <p:nvPr/>
-        </p:nvSpPr>
-        <p:spPr>
-          <a:xfrm>
-            <a:off x="2816352" y="1463040"/>
-            <a:ext cx="1748988" cy="384048"/>
-          </a:xfrm>
-          <a:prstGeom prst="rect">
-            <a:avLst/>
-          </a:prstGeom>
-          <a:noFill/>
-          <a:ln/>
-        </p:spPr>
-        <p:txBody>
-          <a:bodyPr wrap="square" lIns="0" tIns="0" rIns="0" bIns="0" rtlCol="0" anchor="ctr"/>
-          <a:lstStyle/>
-          <a:p>
-            <a:pPr indent="0" marL="0">
-              <a:lnSpc>
-                <a:spcPct val="115000"/>
-              </a:lnSpc>
-              <a:buNone/>
-            </a:pPr>
-            <a:r>
-              <a:rPr lang="en-US" sz="800" dirty="0">
-                <a:solidFill>
-                  <a:srgbClr val="1B2740"/>
-                </a:solidFill>
-                <a:latin typeface="Malgun Gothic" pitchFamily="34" charset="0"/>
-                <a:ea typeface="Malgun Gothic" pitchFamily="34" charset="-122"/>
-                <a:cs typeface="Malgun Gothic" pitchFamily="34" charset="-120"/>
-              </a:rPr>
-              <a:t>Copy</a:t>
-            </a:r>
-            <a:endParaRPr lang="en-US" sz="800" dirty="0"/>
-          </a:p>
-        </p:txBody>
-      </p:sp>
-      <p:pic>
-        <p:nvPicPr>
-          <p:cNvPr id="13" name="Image 1" descr="preencoded.png">    </p:cNvPr>
-          <p:cNvPicPr>
-            <a:picLocks noChangeAspect="1"/>
-          </p:cNvPicPr>
-          <p:nvPr/>
-        </p:nvPicPr>
-        <p:blipFill>
-          <a:blip r:embed="rId2"/>
-          <a:stretch>
-            <a:fillRect/>
-          </a:stretch>
-        </p:blipFill>
-        <p:spPr>
-          <a:xfrm>
-            <a:off x="4448794" y="1755648"/>
-            <a:ext cx="603504" cy="603504"/>
-          </a:xfrm>
-          <a:prstGeom prst="rect">
-            <a:avLst/>
-          </a:prstGeom>
-        </p:spPr>
-      </p:pic>
-      <p:sp>
-        <p:nvSpPr>
-          <p:cNvPr id="14" name="Text 10"/>
-          <p:cNvSpPr txBox="1"/>
-          <p:nvPr/>
-        </p:nvSpPr>
-        <p:spPr>
-          <a:xfrm>
-            <a:off x="2816352" y="2834640"/>
-            <a:ext cx="1748988" cy="384048"/>
-          </a:xfrm>
-          <a:prstGeom prst="rect">
-            <a:avLst/>
-          </a:prstGeom>
-          <a:noFill/>
-          <a:ln/>
-        </p:spPr>
-        <p:txBody>
-          <a:bodyPr wrap="square" lIns="0" tIns="0" rIns="0" bIns="0" rtlCol="0" anchor="ctr"/>
-          <a:lstStyle/>
-          <a:p>
-            <a:pPr indent="0" marL="0">
-              <a:lnSpc>
-                <a:spcPct val="115000"/>
-              </a:lnSpc>
-              <a:buNone/>
-            </a:pPr>
-            <a:r>
-              <a:rPr lang="en-US" sz="800" dirty="0">
-                <a:solidFill>
-                  <a:srgbClr val="1B2740"/>
-                </a:solidFill>
-                <a:latin typeface="Malgun Gothic" pitchFamily="34" charset="0"/>
-                <a:ea typeface="Malgun Gothic" pitchFamily="34" charset="-122"/>
-                <a:cs typeface="Malgun Gothic" pitchFamily="34" charset="-120"/>
-              </a:rPr>
-              <a:t>TV</a:t>
-            </a:r>
-            <a:endParaRPr lang="en-US" sz="800" dirty="0"/>
-          </a:p>
-        </p:txBody>
-      </p:sp>
-      <p:pic>
-        <p:nvPicPr>
-          <p:cNvPr id="15" name="Image 2" descr="preencoded.png">    </p:cNvPr>
-          <p:cNvPicPr>
-            <a:picLocks noChangeAspect="1"/>
-          </p:cNvPicPr>
-          <p:nvPr/>
-        </p:nvPicPr>
-        <p:blipFill>
-          <a:blip r:embed="rId3"/>
-          <a:stretch>
-            <a:fillRect/>
-          </a:stretch>
-        </p:blipFill>
-        <p:spPr>
-          <a:xfrm>
-            <a:off x="4448794" y="3127248"/>
-            <a:ext cx="603504" cy="603504"/>
-          </a:xfrm>
-          <a:prstGeom prst="rect">
-            <a:avLst/>
-          </a:prstGeom>
-        </p:spPr>
-      </p:pic>
-      <p:sp>
-        <p:nvSpPr>
-          <p:cNvPr id="16" name="Text 11"/>
-          <p:cNvSpPr txBox="1"/>
-          <p:nvPr/>
-        </p:nvSpPr>
-        <p:spPr>
-          <a:xfrm>
-            <a:off x="2816352" y="4206240"/>
-            <a:ext cx="1748988" cy="384048"/>
-          </a:xfrm>
-          <a:prstGeom prst="rect">
-            <a:avLst/>
-          </a:prstGeom>
-          <a:noFill/>
-          <a:ln/>
-        </p:spPr>
-        <p:txBody>
-          <a:bodyPr wrap="square" lIns="0" tIns="0" rIns="0" bIns="0" rtlCol="0" anchor="ctr"/>
-          <a:lstStyle/>
-          <a:p>
-            <a:pPr indent="0" marL="0">
-              <a:lnSpc>
-                <a:spcPct val="115000"/>
-              </a:lnSpc>
-              <a:buNone/>
-            </a:pPr>
-            <a:r>
-              <a:rPr lang="en-US" sz="800" dirty="0">
-                <a:solidFill>
-                  <a:srgbClr val="1B2740"/>
-                </a:solidFill>
-                <a:latin typeface="Malgun Gothic" pitchFamily="34" charset="0"/>
-                <a:ea typeface="Malgun Gothic" pitchFamily="34" charset="-122"/>
-                <a:cs typeface="Malgun Gothic" pitchFamily="34" charset="-120"/>
-              </a:rPr>
-              <a:t>Image</a:t>
-            </a:r>
-            <a:endParaRPr lang="en-US" sz="800" dirty="0"/>
-          </a:p>
-        </p:txBody>
-      </p:sp>
-      <p:pic>
-        <p:nvPicPr>
-          <p:cNvPr id="17" name="Image 3" descr="preencoded.png">    </p:cNvPr>
-          <p:cNvPicPr>
-            <a:picLocks noChangeAspect="1"/>
-          </p:cNvPicPr>
-          <p:nvPr/>
-        </p:nvPicPr>
-        <p:blipFill>
-          <a:blip r:embed="rId4"/>
-          <a:stretch>
-            <a:fillRect/>
-          </a:stretch>
-        </p:blipFill>
-        <p:spPr>
-          <a:xfrm>
-            <a:off x="4448794" y="4498848"/>
-            <a:ext cx="603504" cy="603504"/>
-          </a:xfrm>
-          <a:prstGeom prst="rect">
-            <a:avLst/>
-          </a:prstGeom>
-        </p:spPr>
-      </p:pic>
-      <p:sp>
-        <p:nvSpPr>
-          <p:cNvPr id="18" name="Text 12"/>
-          <p:cNvSpPr txBox="1"/>
-          <p:nvPr/>
-        </p:nvSpPr>
-        <p:spPr>
-          <a:xfrm>
-            <a:off x="2816352" y="5577840"/>
-            <a:ext cx="1748988" cy="384048"/>
-          </a:xfrm>
-          <a:prstGeom prst="rect">
-            <a:avLst/>
-          </a:prstGeom>
-          <a:noFill/>
-          <a:ln/>
-        </p:spPr>
-        <p:txBody>
-          <a:bodyPr wrap="square" lIns="0" tIns="0" rIns="0" bIns="0" rtlCol="0" anchor="ctr"/>
-          <a:lstStyle/>
-          <a:p>
-            <a:pPr indent="0" marL="0">
-              <a:lnSpc>
-                <a:spcPct val="115000"/>
-              </a:lnSpc>
-              <a:buNone/>
-            </a:pPr>
-            <a:r>
-              <a:rPr lang="en-US" sz="800" dirty="0">
-                <a:solidFill>
-                  <a:srgbClr val="1B2740"/>
-                </a:solidFill>
-                <a:latin typeface="Malgun Gothic" pitchFamily="34" charset="0"/>
-                <a:ea typeface="Malgun Gothic" pitchFamily="34" charset="-122"/>
-                <a:cs typeface="Malgun Gothic" pitchFamily="34" charset="-120"/>
-              </a:rPr>
-              <a:t>Human</a:t>
-            </a:r>
-            <a:endParaRPr lang="en-US" sz="800" dirty="0"/>
-          </a:p>
-        </p:txBody>
-      </p:sp>
-      <p:pic>
-        <p:nvPicPr>
-          <p:cNvPr id="19" name="Image 4" descr="preencoded.png">    </p:cNvPr>
-          <p:cNvPicPr>
-            <a:picLocks noChangeAspect="1"/>
-          </p:cNvPicPr>
-          <p:nvPr/>
-        </p:nvPicPr>
-        <p:blipFill>
-          <a:blip r:embed="rId5"/>
-          <a:stretch>
-            <a:fillRect/>
-          </a:stretch>
-        </p:blipFill>
-        <p:spPr>
-          <a:xfrm>
-            <a:off x="4448794" y="5870448"/>
-            <a:ext cx="603504" cy="603504"/>
-          </a:xfrm>
-          <a:prstGeom prst="rect">
-            <a:avLst/>
-          </a:prstGeom>
-        </p:spPr>
-      </p:pic>
-      <p:sp>
-        <p:nvSpPr>
-          <p:cNvPr id="20" name="Text 13"/>
-          <p:cNvSpPr txBox="1"/>
-          <p:nvPr/>
-        </p:nvSpPr>
-        <p:spPr>
-          <a:xfrm>
-            <a:off x="5996330" y="91440"/>
-            <a:ext cx="1748988" cy="384048"/>
-          </a:xfrm>
-          <a:prstGeom prst="rect">
-            <a:avLst/>
-          </a:prstGeom>
-          <a:noFill/>
-          <a:ln/>
-        </p:spPr>
-        <p:txBody>
-          <a:bodyPr wrap="square" lIns="0" tIns="0" rIns="0" bIns="0" rtlCol="0" anchor="ctr"/>
-          <a:lstStyle/>
-          <a:p>
-            <a:pPr indent="0" marL="0">
-              <a:lnSpc>
-                <a:spcPct val="115000"/>
-              </a:lnSpc>
-              <a:buNone/>
-            </a:pPr>
-            <a:r>
-              <a:rPr lang="en-US" sz="800" dirty="0">
-                <a:solidFill>
-                  <a:srgbClr val="1B2740"/>
-                </a:solidFill>
-                <a:latin typeface="Malgun Gothic" pitchFamily="34" charset="0"/>
-                <a:ea typeface="Malgun Gothic" pitchFamily="34" charset="-122"/>
-                <a:cs typeface="Malgun Gothic" pitchFamily="34" charset="-120"/>
-              </a:rPr>
-              <a:t>Laptop</a:t>
-            </a:r>
-            <a:endParaRPr lang="en-US" sz="800" dirty="0"/>
-          </a:p>
-        </p:txBody>
-      </p:sp>
-      <p:pic>
-        <p:nvPicPr>
-          <p:cNvPr id="21" name="Image 5" descr="preencoded.png">    </p:cNvPr>
-          <p:cNvPicPr>
-            <a:picLocks noChangeAspect="1"/>
-          </p:cNvPicPr>
-          <p:nvPr/>
-        </p:nvPicPr>
-        <p:blipFill>
-          <a:blip r:embed="rId6"/>
-          <a:stretch>
-            <a:fillRect/>
-          </a:stretch>
-        </p:blipFill>
-        <p:spPr>
-          <a:xfrm>
-            <a:off x="7628772" y="384048"/>
-            <a:ext cx="603504" cy="603504"/>
-          </a:xfrm>
-          <a:prstGeom prst="rect">
-            <a:avLst/>
-          </a:prstGeom>
-        </p:spPr>
-      </p:pic>
-      <p:sp>
-        <p:nvSpPr>
-          <p:cNvPr id="22" name="Text 14"/>
-          <p:cNvSpPr txBox="1"/>
-          <p:nvPr/>
-        </p:nvSpPr>
-        <p:spPr>
-          <a:xfrm>
-            <a:off x="5996330" y="1463040"/>
-            <a:ext cx="1748988" cy="384048"/>
-          </a:xfrm>
-          <a:prstGeom prst="rect">
-            <a:avLst/>
-          </a:prstGeom>
-          <a:noFill/>
-          <a:ln/>
-        </p:spPr>
-        <p:txBody>
-          <a:bodyPr wrap="square" lIns="0" tIns="0" rIns="0" bIns="0" rtlCol="0" anchor="ctr"/>
-          <a:lstStyle/>
-          <a:p>
-            <a:pPr indent="0" marL="0">
-              <a:lnSpc>
-                <a:spcPct val="115000"/>
-              </a:lnSpc>
-              <a:buNone/>
-            </a:pPr>
-            <a:r>
-              <a:rPr lang="en-US" sz="800" dirty="0">
-                <a:solidFill>
-                  <a:srgbClr val="1B2740"/>
-                </a:solidFill>
-                <a:latin typeface="Malgun Gothic" pitchFamily="34" charset="0"/>
-                <a:ea typeface="Malgun Gothic" pitchFamily="34" charset="-122"/>
-                <a:cs typeface="Malgun Gothic" pitchFamily="34" charset="-120"/>
-              </a:rPr>
-              <a:t>Folder</a:t>
-            </a:r>
-            <a:endParaRPr lang="en-US" sz="800" dirty="0"/>
-          </a:p>
-        </p:txBody>
-      </p:sp>
-      <p:pic>
-        <p:nvPicPr>
-          <p:cNvPr id="23" name="Image 6" descr="preencoded.png">    </p:cNvPr>
-          <p:cNvPicPr>
-            <a:picLocks noChangeAspect="1"/>
-          </p:cNvPicPr>
-          <p:nvPr/>
-        </p:nvPicPr>
-        <p:blipFill>
-          <a:blip r:embed="rId7"/>
-          <a:stretch>
-            <a:fillRect/>
-          </a:stretch>
-        </p:blipFill>
-        <p:spPr>
-          <a:xfrm>
-            <a:off x="7628772" y="1755648"/>
-            <a:ext cx="603504" cy="603504"/>
-          </a:xfrm>
-          <a:prstGeom prst="rect">
-            <a:avLst/>
-          </a:prstGeom>
-        </p:spPr>
-      </p:pic>
-      <p:sp>
-        <p:nvSpPr>
-          <p:cNvPr id="24" name="Text 15"/>
-          <p:cNvSpPr txBox="1"/>
-          <p:nvPr/>
-        </p:nvSpPr>
-        <p:spPr>
-          <a:xfrm>
-            <a:off x="5996330" y="2834640"/>
-            <a:ext cx="1748988" cy="384048"/>
-          </a:xfrm>
-          <a:prstGeom prst="rect">
-            <a:avLst/>
-          </a:prstGeom>
-          <a:noFill/>
-          <a:ln/>
-        </p:spPr>
-        <p:txBody>
-          <a:bodyPr wrap="square" lIns="0" tIns="0" rIns="0" bIns="0" rtlCol="0" anchor="ctr"/>
-          <a:lstStyle/>
-          <a:p>
-            <a:pPr indent="0" marL="0">
-              <a:lnSpc>
-                <a:spcPct val="115000"/>
-              </a:lnSpc>
-              <a:buNone/>
-            </a:pPr>
-            <a:r>
-              <a:rPr lang="en-US" sz="800" dirty="0">
-                <a:solidFill>
-                  <a:srgbClr val="1B2740"/>
-                </a:solidFill>
-                <a:latin typeface="Malgun Gothic" pitchFamily="34" charset="0"/>
-                <a:ea typeface="Malgun Gothic" pitchFamily="34" charset="-122"/>
-                <a:cs typeface="Malgun Gothic" pitchFamily="34" charset="-120"/>
-              </a:rPr>
-              <a:t>Creative</a:t>
-            </a:r>
-            <a:endParaRPr lang="en-US" sz="800" dirty="0"/>
-          </a:p>
-        </p:txBody>
-      </p:sp>
-      <p:pic>
-        <p:nvPicPr>
-          <p:cNvPr id="25" name="Image 7" descr="preencoded.png">    </p:cNvPr>
-          <p:cNvPicPr>
-            <a:picLocks noChangeAspect="1"/>
-          </p:cNvPicPr>
-          <p:nvPr/>
-        </p:nvPicPr>
-        <p:blipFill>
-          <a:blip r:embed="rId8"/>
-          <a:stretch>
-            <a:fillRect/>
-          </a:stretch>
-        </p:blipFill>
-        <p:spPr>
-          <a:xfrm>
-            <a:off x="7628772" y="3127248"/>
-            <a:ext cx="603504" cy="603504"/>
-          </a:xfrm>
-          <a:prstGeom prst="rect">
-            <a:avLst/>
-          </a:prstGeom>
-        </p:spPr>
-      </p:pic>
-      <p:sp>
-        <p:nvSpPr>
-          <p:cNvPr id="26" name="Text 16"/>
-          <p:cNvSpPr txBox="1"/>
-          <p:nvPr/>
-        </p:nvSpPr>
-        <p:spPr>
-          <a:xfrm>
-            <a:off x="5996330" y="4206240"/>
-            <a:ext cx="1748988" cy="384048"/>
-          </a:xfrm>
-          <a:prstGeom prst="rect">
-            <a:avLst/>
-          </a:prstGeom>
-          <a:noFill/>
-          <a:ln/>
-        </p:spPr>
-        <p:txBody>
-          <a:bodyPr wrap="square" lIns="0" tIns="0" rIns="0" bIns="0" rtlCol="0" anchor="ctr"/>
-          <a:lstStyle/>
-          <a:p>
-            <a:pPr indent="0" marL="0">
-              <a:lnSpc>
-                <a:spcPct val="115000"/>
-              </a:lnSpc>
-              <a:buNone/>
-            </a:pPr>
-            <a:r>
-              <a:rPr lang="en-US" sz="800" dirty="0">
-                <a:solidFill>
-                  <a:srgbClr val="1B2740"/>
-                </a:solidFill>
-                <a:latin typeface="Malgun Gothic" pitchFamily="34" charset="0"/>
-                <a:ea typeface="Malgun Gothic" pitchFamily="34" charset="-122"/>
-                <a:cs typeface="Malgun Gothic" pitchFamily="34" charset="-120"/>
-              </a:rPr>
-              <a:t>Video</a:t>
-            </a:r>
-            <a:endParaRPr lang="en-US" sz="800" dirty="0"/>
-          </a:p>
-        </p:txBody>
-      </p:sp>
-      <p:pic>
-        <p:nvPicPr>
-          <p:cNvPr id="27" name="Image 8" descr="preencoded.png">    </p:cNvPr>
-          <p:cNvPicPr>
-            <a:picLocks noChangeAspect="1"/>
-          </p:cNvPicPr>
-          <p:nvPr/>
-        </p:nvPicPr>
-        <p:blipFill>
-          <a:blip r:embed="rId9"/>
-          <a:stretch>
-            <a:fillRect/>
-          </a:stretch>
-        </p:blipFill>
-        <p:spPr>
-          <a:xfrm>
-            <a:off x="7628772" y="4498848"/>
-            <a:ext cx="603504" cy="603504"/>
-          </a:xfrm>
-          <a:prstGeom prst="rect">
-            <a:avLst/>
-          </a:prstGeom>
-        </p:spPr>
-      </p:pic>
-      <p:sp>
-        <p:nvSpPr>
-          <p:cNvPr id="28" name="Text 17"/>
-          <p:cNvSpPr txBox="1"/>
-          <p:nvPr/>
-        </p:nvSpPr>
-        <p:spPr>
-          <a:xfrm>
-            <a:off x="5996330" y="5577840"/>
-            <a:ext cx="1748988" cy="384048"/>
-          </a:xfrm>
-          <a:prstGeom prst="rect">
-            <a:avLst/>
-          </a:prstGeom>
-          <a:noFill/>
-          <a:ln/>
-        </p:spPr>
-        <p:txBody>
-          <a:bodyPr wrap="square" lIns="0" tIns="0" rIns="0" bIns="0" rtlCol="0" anchor="ctr"/>
-          <a:lstStyle/>
-          <a:p>
-            <a:pPr indent="0" marL="0">
-              <a:lnSpc>
-                <a:spcPct val="115000"/>
-              </a:lnSpc>
-              <a:buNone/>
-            </a:pPr>
-            <a:r>
-              <a:rPr lang="en-US" sz="800" dirty="0">
-                <a:solidFill>
-                  <a:srgbClr val="1B2740"/>
-                </a:solidFill>
-                <a:latin typeface="Malgun Gothic" pitchFamily="34" charset="0"/>
-                <a:ea typeface="Malgun Gothic" pitchFamily="34" charset="-122"/>
-                <a:cs typeface="Malgun Gothic" pitchFamily="34" charset="-120"/>
-              </a:rPr>
-              <a:t>Set-up</a:t>
-            </a:r>
-            <a:endParaRPr lang="en-US" sz="800" dirty="0"/>
-          </a:p>
-        </p:txBody>
-      </p:sp>
-      <p:pic>
-        <p:nvPicPr>
-          <p:cNvPr id="29" name="Image 9" descr="preencoded.png">    </p:cNvPr>
-          <p:cNvPicPr>
-            <a:picLocks noChangeAspect="1"/>
-          </p:cNvPicPr>
-          <p:nvPr/>
-        </p:nvPicPr>
-        <p:blipFill>
-          <a:blip r:embed="rId10"/>
-          <a:stretch>
-            <a:fillRect/>
-          </a:stretch>
-        </p:blipFill>
-        <p:spPr>
-          <a:xfrm>
-            <a:off x="7628772" y="5870448"/>
-            <a:ext cx="603504" cy="603504"/>
-          </a:xfrm>
-          <a:prstGeom prst="rect">
-            <a:avLst/>
-          </a:prstGeom>
-        </p:spPr>
-      </p:pic>
-      <p:sp>
-        <p:nvSpPr>
-          <p:cNvPr id="30" name="Text 18"/>
-          <p:cNvSpPr txBox="1"/>
-          <p:nvPr/>
-        </p:nvSpPr>
-        <p:spPr>
-          <a:xfrm>
-            <a:off x="9176309" y="91440"/>
-            <a:ext cx="1748988" cy="384048"/>
-          </a:xfrm>
-          <a:prstGeom prst="rect">
-            <a:avLst/>
-          </a:prstGeom>
-          <a:noFill/>
-          <a:ln/>
-        </p:spPr>
-        <p:txBody>
-          <a:bodyPr wrap="square" lIns="0" tIns="0" rIns="0" bIns="0" rtlCol="0" anchor="ctr"/>
-          <a:lstStyle/>
-          <a:p>
-            <a:pPr indent="0" marL="0">
-              <a:lnSpc>
-                <a:spcPct val="115000"/>
-              </a:lnSpc>
-              <a:buNone/>
-            </a:pPr>
-            <a:r>
-              <a:rPr lang="en-US" sz="800" dirty="0">
-                <a:solidFill>
-                  <a:srgbClr val="1B2740"/>
-                </a:solidFill>
-                <a:latin typeface="Malgun Gothic" pitchFamily="34" charset="0"/>
-                <a:ea typeface="Malgun Gothic" pitchFamily="34" charset="-122"/>
-                <a:cs typeface="Malgun Gothic" pitchFamily="34" charset="-120"/>
-              </a:rPr>
-              <a:t>Mobile</a:t>
-            </a:r>
-            <a:endParaRPr lang="en-US" sz="800" dirty="0"/>
-          </a:p>
-        </p:txBody>
-      </p:sp>
-      <p:pic>
-        <p:nvPicPr>
-          <p:cNvPr id="31" name="Image 10" descr="preencoded.png">    </p:cNvPr>
-          <p:cNvPicPr>
-            <a:picLocks noChangeAspect="1"/>
-          </p:cNvPicPr>
-          <p:nvPr/>
-        </p:nvPicPr>
-        <p:blipFill>
-          <a:blip r:embed="rId11"/>
-          <a:stretch>
-            <a:fillRect/>
-          </a:stretch>
-        </p:blipFill>
-        <p:spPr>
-          <a:xfrm>
-            <a:off x="10808751" y="384048"/>
-            <a:ext cx="603504" cy="603504"/>
-          </a:xfrm>
-          <a:prstGeom prst="rect">
-            <a:avLst/>
-          </a:prstGeom>
-        </p:spPr>
-      </p:pic>
-      <p:sp>
-        <p:nvSpPr>
-          <p:cNvPr id="32" name="Text 19"/>
-          <p:cNvSpPr txBox="1"/>
-          <p:nvPr/>
-        </p:nvSpPr>
-        <p:spPr>
-          <a:xfrm>
-            <a:off x="9176309" y="1463040"/>
-            <a:ext cx="1748988" cy="384048"/>
-          </a:xfrm>
-          <a:prstGeom prst="rect">
-            <a:avLst/>
-          </a:prstGeom>
-          <a:noFill/>
-          <a:ln/>
-        </p:spPr>
-        <p:txBody>
-          <a:bodyPr wrap="square" lIns="0" tIns="0" rIns="0" bIns="0" rtlCol="0" anchor="ctr"/>
-          <a:lstStyle/>
-          <a:p>
-            <a:pPr indent="0" marL="0">
-              <a:lnSpc>
-                <a:spcPct val="115000"/>
-              </a:lnSpc>
-              <a:buNone/>
-            </a:pPr>
-            <a:r>
-              <a:rPr lang="en-US" sz="800" dirty="0">
-                <a:solidFill>
-                  <a:srgbClr val="1B2740"/>
-                </a:solidFill>
-                <a:latin typeface="Malgun Gothic" pitchFamily="34" charset="0"/>
-                <a:ea typeface="Malgun Gothic" pitchFamily="34" charset="-122"/>
-                <a:cs typeface="Malgun Gothic" pitchFamily="34" charset="-120"/>
-              </a:rPr>
-              <a:t>Pie chart</a:t>
-            </a:r>
-            <a:endParaRPr lang="en-US" sz="800" dirty="0"/>
-          </a:p>
-        </p:txBody>
-      </p:sp>
-      <p:pic>
-        <p:nvPicPr>
-          <p:cNvPr id="33" name="Image 11" descr="preencoded.png">    </p:cNvPr>
-          <p:cNvPicPr>
-            <a:picLocks noChangeAspect="1"/>
-          </p:cNvPicPr>
-          <p:nvPr/>
-        </p:nvPicPr>
-        <p:blipFill>
-          <a:blip r:embed="rId12"/>
-          <a:stretch>
-            <a:fillRect/>
-          </a:stretch>
-        </p:blipFill>
-        <p:spPr>
-          <a:xfrm>
-            <a:off x="10808751" y="1755648"/>
-            <a:ext cx="603504" cy="603504"/>
-          </a:xfrm>
-          <a:prstGeom prst="rect">
-            <a:avLst/>
-          </a:prstGeom>
-        </p:spPr>
-      </p:pic>
-      <p:sp>
-        <p:nvSpPr>
-          <p:cNvPr id="34" name="Text 20"/>
-          <p:cNvSpPr txBox="1"/>
-          <p:nvPr/>
-        </p:nvSpPr>
-        <p:spPr>
-          <a:xfrm>
-            <a:off x="9176309" y="2834640"/>
-            <a:ext cx="1748988" cy="384048"/>
-          </a:xfrm>
-          <a:prstGeom prst="rect">
-            <a:avLst/>
-          </a:prstGeom>
-          <a:noFill/>
-          <a:ln/>
-        </p:spPr>
-        <p:txBody>
-          <a:bodyPr wrap="square" lIns="0" tIns="0" rIns="0" bIns="0" rtlCol="0" anchor="ctr"/>
-          <a:lstStyle/>
-          <a:p>
-            <a:pPr indent="0" marL="0">
-              <a:lnSpc>
-                <a:spcPct val="115000"/>
-              </a:lnSpc>
-              <a:buNone/>
-            </a:pPr>
-            <a:r>
-              <a:rPr lang="en-US" sz="800" dirty="0">
-                <a:solidFill>
-                  <a:srgbClr val="1B2740"/>
-                </a:solidFill>
-                <a:latin typeface="Malgun Gothic" pitchFamily="34" charset="0"/>
-                <a:ea typeface="Malgun Gothic" pitchFamily="34" charset="-122"/>
-                <a:cs typeface="Malgun Gothic" pitchFamily="34" charset="-120"/>
-              </a:rPr>
-              <a:t>Mail</a:t>
-            </a:r>
-            <a:endParaRPr lang="en-US" sz="800" dirty="0"/>
-          </a:p>
-        </p:txBody>
-      </p:sp>
-      <p:pic>
-        <p:nvPicPr>
-          <p:cNvPr id="35" name="Image 12" descr="preencoded.png">    </p:cNvPr>
-          <p:cNvPicPr>
-            <a:picLocks noChangeAspect="1"/>
-          </p:cNvPicPr>
-          <p:nvPr/>
-        </p:nvPicPr>
-        <p:blipFill>
-          <a:blip r:embed="rId13"/>
-          <a:stretch>
-            <a:fillRect/>
-          </a:stretch>
-        </p:blipFill>
-        <p:spPr>
-          <a:xfrm>
-            <a:off x="10808751" y="3127248"/>
-            <a:ext cx="603504" cy="603504"/>
-          </a:xfrm>
-          <a:prstGeom prst="rect">
-            <a:avLst/>
-          </a:prstGeom>
-        </p:spPr>
-      </p:pic>
-      <p:sp>
-        <p:nvSpPr>
-          <p:cNvPr id="36" name="Text 21"/>
-          <p:cNvSpPr txBox="1"/>
-          <p:nvPr/>
-        </p:nvSpPr>
-        <p:spPr>
-          <a:xfrm>
-            <a:off x="9176309" y="4206240"/>
-            <a:ext cx="1748988" cy="384048"/>
-          </a:xfrm>
-          <a:prstGeom prst="rect">
-            <a:avLst/>
-          </a:prstGeom>
-          <a:noFill/>
-          <a:ln/>
-        </p:spPr>
-        <p:txBody>
-          <a:bodyPr wrap="square" lIns="0" tIns="0" rIns="0" bIns="0" rtlCol="0" anchor="ctr"/>
-          <a:lstStyle/>
-          <a:p>
-            <a:pPr indent="0" marL="0">
-              <a:lnSpc>
-                <a:spcPct val="115000"/>
-              </a:lnSpc>
-              <a:buNone/>
-            </a:pPr>
-            <a:r>
-              <a:rPr lang="en-US" sz="800" dirty="0">
-                <a:solidFill>
-                  <a:srgbClr val="1B2740"/>
-                </a:solidFill>
-                <a:latin typeface="Malgun Gothic" pitchFamily="34" charset="0"/>
-                <a:ea typeface="Malgun Gothic" pitchFamily="34" charset="-122"/>
-                <a:cs typeface="Malgun Gothic" pitchFamily="34" charset="-120"/>
-              </a:rPr>
-              <a:t>Wifi(router)</a:t>
-            </a:r>
-            <a:endParaRPr lang="en-US" sz="800" dirty="0"/>
-          </a:p>
-        </p:txBody>
-      </p:sp>
-      <p:pic>
-        <p:nvPicPr>
-          <p:cNvPr id="37" name="Image 13" descr="preencoded.png">    </p:cNvPr>
-          <p:cNvPicPr>
-            <a:picLocks noChangeAspect="1"/>
-          </p:cNvPicPr>
-          <p:nvPr/>
-        </p:nvPicPr>
-        <p:blipFill>
-          <a:blip r:embed="rId14"/>
-          <a:stretch>
-            <a:fillRect/>
-          </a:stretch>
-        </p:blipFill>
-        <p:spPr>
-          <a:xfrm>
-            <a:off x="10808751" y="4498848"/>
-            <a:ext cx="603504" cy="603504"/>
-          </a:xfrm>
-          <a:prstGeom prst="rect">
-            <a:avLst/>
-          </a:prstGeom>
-        </p:spPr>
-      </p:pic>
-      <p:sp>
-        <p:nvSpPr>
-          <p:cNvPr id="38" name="Text 22"/>
-          <p:cNvSpPr txBox="1"/>
-          <p:nvPr/>
-        </p:nvSpPr>
-        <p:spPr>
-          <a:xfrm>
-            <a:off x="9176309" y="5577840"/>
-            <a:ext cx="1748988" cy="384048"/>
-          </a:xfrm>
-          <a:prstGeom prst="rect">
-            <a:avLst/>
-          </a:prstGeom>
-          <a:noFill/>
-          <a:ln/>
-        </p:spPr>
-        <p:txBody>
-          <a:bodyPr wrap="square" lIns="0" tIns="0" rIns="0" bIns="0" rtlCol="0" anchor="ctr"/>
-          <a:lstStyle/>
-          <a:p>
-            <a:pPr indent="0" marL="0">
-              <a:lnSpc>
-                <a:spcPct val="115000"/>
-              </a:lnSpc>
-              <a:buNone/>
-            </a:pPr>
-            <a:r>
-              <a:rPr lang="en-US" sz="800" dirty="0">
-                <a:solidFill>
-                  <a:srgbClr val="1B2740"/>
-                </a:solidFill>
-                <a:latin typeface="Malgun Gothic" pitchFamily="34" charset="0"/>
-                <a:ea typeface="Malgun Gothic" pitchFamily="34" charset="-122"/>
-                <a:cs typeface="Malgun Gothic" pitchFamily="34" charset="-120"/>
-              </a:rPr>
-              <a:t>Chart</a:t>
-            </a:r>
-            <a:endParaRPr lang="en-US" sz="800" dirty="0"/>
-          </a:p>
-        </p:txBody>
-      </p:sp>
-      <p:pic>
-        <p:nvPicPr>
-          <p:cNvPr id="39" name="Image 14" descr="preencoded.png">    </p:cNvPr>
-          <p:cNvPicPr>
-            <a:picLocks noChangeAspect="1"/>
-          </p:cNvPicPr>
-          <p:nvPr/>
-        </p:nvPicPr>
-        <p:blipFill>
-          <a:blip r:embed="rId15"/>
-          <a:stretch>
-            <a:fillRect/>
-          </a:stretch>
-        </p:blipFill>
-        <p:spPr>
-          <a:xfrm>
-            <a:off x="10808751" y="5870448"/>
-            <a:ext cx="603504" cy="603504"/>
-          </a:xfrm>
-          <a:prstGeom prst="rect">
-            <a:avLst/>
-          </a:prstGeom>
-        </p:spPr>
-      </p:pic>
-    </p:spTree>
-  </p:cSld>
-  <p:clrMapOvr>
-    <a:masterClrMapping/>
-  </p:clrMapOvr>
-</p:sld>
-</file>
-
-<file path=ppt/slides/slide10.xml><?xml version="1.0" encoding="utf-8"?>
-<p:sld xmlns:a="http://schemas.openxmlformats.org/drawingml/2006/main" xmlns:r="http://schemas.openxmlformats.org/officeDocument/2006/relationships" xmlns:p="http://schemas.openxmlformats.org/presentationml/2006/main">
-  <p:cSld name="Slide 10">
-    <p:bg>
-      <p:bgPr>
-        <a:solidFill>
-          <a:srgbClr val="FFFFFF"/>
-        </a:solidFill>
-      </p:bgPr>
-    </p:bg>
-    <p:spTree>
-      <p:nvGrpSpPr>
-        <p:cNvPr id="1" name=""/>
-        <p:cNvGrpSpPr/>
-        <p:nvPr/>
-      </p:nvGrpSpPr>
-      <p:grpSpPr>
-        <a:xfrm>
-          <a:off x="0" y="0"/>
-          <a:ext cx="0" cy="0"/>
-          <a:chOff x="0" y="0"/>
-          <a:chExt cx="0" cy="0"/>
-        </a:xfrm>
-      </p:grpSpPr>
-      <p:sp>
-        <p:nvSpPr>
-          <p:cNvPr id="2" name="Shape 0"/>
-          <p:cNvSpPr/>
-          <p:nvPr/>
-        </p:nvSpPr>
-        <p:spPr>
-          <a:xfrm>
-            <a:off x="0" y="0"/>
-            <a:ext cx="2651760" cy="3429000"/>
-          </a:xfrm>
-          <a:prstGeom prst="rect">
-            <a:avLst/>
-          </a:prstGeom>
-          <a:solidFill>
-            <a:srgbClr val="1E2C4F"/>
-          </a:solidFill>
-          <a:ln w="12700">
-            <a:solidFill>
-              <a:srgbClr val="1E2C4F"/>
-            </a:solidFill>
-            <a:prstDash val="solid"/>
-          </a:ln>
-        </p:spPr>
-      </p:sp>
-      <p:sp>
-        <p:nvSpPr>
-          <p:cNvPr id="3" name="Shape 1"/>
-          <p:cNvSpPr/>
-          <p:nvPr/>
-        </p:nvSpPr>
-        <p:spPr>
-          <a:xfrm>
-            <a:off x="5831738" y="0"/>
-            <a:ext cx="0" cy="6858000"/>
-          </a:xfrm>
-          <a:prstGeom prst="line">
-            <a:avLst/>
-          </a:prstGeom>
-          <a:noFill/>
-          <a:ln w="7620">
-            <a:solidFill>
-              <a:srgbClr val="D2D9E5"/>
-            </a:solidFill>
-            <a:prstDash val="solid"/>
-          </a:ln>
-        </p:spPr>
-      </p:sp>
-      <p:sp>
-        <p:nvSpPr>
-          <p:cNvPr id="4" name="Shape 2"/>
-          <p:cNvSpPr/>
-          <p:nvPr/>
-        </p:nvSpPr>
-        <p:spPr>
-          <a:xfrm>
-            <a:off x="9011717" y="0"/>
-            <a:ext cx="0" cy="6858000"/>
-          </a:xfrm>
-          <a:prstGeom prst="line">
-            <a:avLst/>
-          </a:prstGeom>
-          <a:noFill/>
-          <a:ln w="7620">
-            <a:solidFill>
-              <a:srgbClr val="D2D9E5"/>
-            </a:solidFill>
-            <a:prstDash val="solid"/>
-          </a:ln>
-        </p:spPr>
-      </p:sp>
-      <p:sp>
-        <p:nvSpPr>
-          <p:cNvPr id="5" name="Shape 3"/>
-          <p:cNvSpPr/>
-          <p:nvPr/>
-        </p:nvSpPr>
-        <p:spPr>
-          <a:xfrm>
-            <a:off x="2651760" y="3429000"/>
-            <a:ext cx="0" cy="3429000"/>
-          </a:xfrm>
-          <a:prstGeom prst="line">
-            <a:avLst/>
-          </a:prstGeom>
-          <a:noFill/>
-          <a:ln w="7620">
-            <a:solidFill>
-              <a:srgbClr val="D2D9E5"/>
-            </a:solidFill>
-            <a:prstDash val="solid"/>
-          </a:ln>
-        </p:spPr>
-      </p:sp>
-      <p:sp>
-        <p:nvSpPr>
-          <p:cNvPr id="6" name="Shape 4"/>
-          <p:cNvSpPr/>
-          <p:nvPr/>
-        </p:nvSpPr>
-        <p:spPr>
-          <a:xfrm>
-            <a:off x="2651760" y="1371600"/>
-            <a:ext cx="9539935" cy="0"/>
-          </a:xfrm>
-          <a:prstGeom prst="line">
-            <a:avLst/>
-          </a:prstGeom>
-          <a:noFill/>
-          <a:ln w="7620">
-            <a:solidFill>
-              <a:srgbClr val="D2D9E5"/>
-            </a:solidFill>
-            <a:prstDash val="sysDash"/>
-          </a:ln>
-        </p:spPr>
-      </p:sp>
-      <p:sp>
-        <p:nvSpPr>
-          <p:cNvPr id="7" name="Shape 5"/>
-          <p:cNvSpPr/>
-          <p:nvPr/>
-        </p:nvSpPr>
-        <p:spPr>
-          <a:xfrm>
-            <a:off x="2651760" y="2743200"/>
-            <a:ext cx="9539935" cy="0"/>
-          </a:xfrm>
-          <a:prstGeom prst="line">
-            <a:avLst/>
-          </a:prstGeom>
-          <a:noFill/>
-          <a:ln w="7620">
-            <a:solidFill>
-              <a:srgbClr val="D2D9E5"/>
-            </a:solidFill>
-            <a:prstDash val="sysDash"/>
-          </a:ln>
-        </p:spPr>
-      </p:sp>
-      <p:sp>
-        <p:nvSpPr>
-          <p:cNvPr id="8" name="Shape 6"/>
-          <p:cNvSpPr/>
-          <p:nvPr/>
-        </p:nvSpPr>
-        <p:spPr>
-          <a:xfrm>
-            <a:off x="2651760" y="4114800"/>
-            <a:ext cx="9539935" cy="0"/>
-          </a:xfrm>
-          <a:prstGeom prst="line">
-            <a:avLst/>
-          </a:prstGeom>
-          <a:noFill/>
-          <a:ln w="7620">
-            <a:solidFill>
-              <a:srgbClr val="D2D9E5"/>
-            </a:solidFill>
-            <a:prstDash val="sysDash"/>
-          </a:ln>
-        </p:spPr>
-      </p:sp>
-      <p:sp>
-        <p:nvSpPr>
-          <p:cNvPr id="9" name="Shape 7"/>
-          <p:cNvSpPr/>
-          <p:nvPr/>
-        </p:nvSpPr>
-        <p:spPr>
-          <a:xfrm>
-            <a:off x="2651760" y="5486400"/>
-            <a:ext cx="9539935" cy="0"/>
-          </a:xfrm>
-          <a:prstGeom prst="line">
-            <a:avLst/>
-          </a:prstGeom>
-          <a:noFill/>
-          <a:ln w="7620">
-            <a:solidFill>
-              <a:srgbClr val="D2D9E5"/>
-            </a:solidFill>
-            <a:prstDash val="sysDash"/>
-          </a:ln>
-        </p:spPr>
-      </p:sp>
-      <p:sp>
-        <p:nvSpPr>
-          <p:cNvPr id="10" name="Text 8"/>
-          <p:cNvSpPr txBox="1"/>
-          <p:nvPr/>
-        </p:nvSpPr>
-        <p:spPr>
-          <a:xfrm>
-            <a:off x="2816352" y="91440"/>
-            <a:ext cx="1748988" cy="384048"/>
-          </a:xfrm>
-          <a:prstGeom prst="rect">
-            <a:avLst/>
-          </a:prstGeom>
-          <a:noFill/>
-          <a:ln/>
-        </p:spPr>
-        <p:txBody>
-          <a:bodyPr wrap="square" lIns="0" tIns="0" rIns="0" bIns="0" rtlCol="0" anchor="ctr"/>
-          <a:lstStyle/>
-          <a:p>
-            <a:pPr indent="0" marL="0">
-              <a:lnSpc>
-                <a:spcPct val="115000"/>
-              </a:lnSpc>
-              <a:buNone/>
-            </a:pPr>
-            <a:r>
-              <a:rPr lang="en-US" sz="800" dirty="0">
-                <a:solidFill>
-                  <a:srgbClr val="1B2740"/>
-                </a:solidFill>
-                <a:latin typeface="Malgun Gothic" pitchFamily="34" charset="0"/>
-                <a:ea typeface="Malgun Gothic" pitchFamily="34" charset="-122"/>
-                <a:cs typeface="Malgun Gothic" pitchFamily="34" charset="-120"/>
-              </a:rPr>
-              <a:t>천궁-II</a:t>
-            </a:r>
-            <a:endParaRPr lang="en-US" sz="800" dirty="0"/>
-          </a:p>
-        </p:txBody>
-      </p:sp>
-      <p:pic>
-        <p:nvPicPr>
-          <p:cNvPr id="11" name="Image 0" descr="preencoded.png">    </p:cNvPr>
-          <p:cNvPicPr>
-            <a:picLocks noChangeAspect="1"/>
-          </p:cNvPicPr>
-          <p:nvPr/>
-        </p:nvPicPr>
-        <p:blipFill>
-          <a:blip r:embed="rId1"/>
-          <a:stretch>
-            <a:fillRect/>
-          </a:stretch>
-        </p:blipFill>
-        <p:spPr>
-          <a:xfrm>
-            <a:off x="4448794" y="384048"/>
-            <a:ext cx="603504" cy="603504"/>
-          </a:xfrm>
-          <a:prstGeom prst="rect">
-            <a:avLst/>
-          </a:prstGeom>
-        </p:spPr>
-      </p:pic>
-      <p:sp>
-        <p:nvSpPr>
-          <p:cNvPr id="12" name="Text 9"/>
-          <p:cNvSpPr txBox="1"/>
-          <p:nvPr/>
-        </p:nvSpPr>
-        <p:spPr>
-          <a:xfrm>
-            <a:off x="2816352" y="1463040"/>
-            <a:ext cx="1748988" cy="384048"/>
-          </a:xfrm>
-          <a:prstGeom prst="rect">
-            <a:avLst/>
-          </a:prstGeom>
-          <a:noFill/>
-          <a:ln/>
-        </p:spPr>
-        <p:txBody>
-          <a:bodyPr wrap="square" lIns="0" tIns="0" rIns="0" bIns="0" rtlCol="0" anchor="ctr"/>
-          <a:lstStyle/>
-          <a:p>
-            <a:pPr indent="0" marL="0">
-              <a:lnSpc>
-                <a:spcPct val="115000"/>
-              </a:lnSpc>
-              <a:buNone/>
-            </a:pPr>
-            <a:r>
-              <a:rPr lang="en-US" sz="800" dirty="0">
-                <a:solidFill>
-                  <a:srgbClr val="1B2740"/>
-                </a:solidFill>
-                <a:latin typeface="Malgun Gothic" pitchFamily="34" charset="0"/>
-                <a:ea typeface="Malgun Gothic" pitchFamily="34" charset="-122"/>
-                <a:cs typeface="Malgun Gothic" pitchFamily="34" charset="-120"/>
-              </a:rPr>
-              <a:t>LSAM AAM</a:t>
-            </a:r>
-            <a:endParaRPr lang="en-US" sz="800" dirty="0"/>
-          </a:p>
-        </p:txBody>
-      </p:sp>
-      <p:pic>
-        <p:nvPicPr>
-          <p:cNvPr id="13" name="Image 1" descr="preencoded.png">    </p:cNvPr>
-          <p:cNvPicPr>
-            <a:picLocks noChangeAspect="1"/>
-          </p:cNvPicPr>
-          <p:nvPr/>
-        </p:nvPicPr>
-        <p:blipFill>
-          <a:blip r:embed="rId2"/>
-          <a:stretch>
-            <a:fillRect/>
-          </a:stretch>
-        </p:blipFill>
-        <p:spPr>
-          <a:xfrm>
-            <a:off x="4448794" y="1755648"/>
-            <a:ext cx="603504" cy="603504"/>
-          </a:xfrm>
-          <a:prstGeom prst="rect">
-            <a:avLst/>
-          </a:prstGeom>
-        </p:spPr>
-      </p:pic>
-      <p:sp>
-        <p:nvSpPr>
-          <p:cNvPr id="14" name="Text 10"/>
-          <p:cNvSpPr txBox="1"/>
-          <p:nvPr/>
-        </p:nvSpPr>
-        <p:spPr>
-          <a:xfrm>
-            <a:off x="2816352" y="2834640"/>
-            <a:ext cx="1748988" cy="384048"/>
-          </a:xfrm>
-          <a:prstGeom prst="rect">
-            <a:avLst/>
-          </a:prstGeom>
-          <a:noFill/>
-          <a:ln/>
-        </p:spPr>
-        <p:txBody>
-          <a:bodyPr wrap="square" lIns="0" tIns="0" rIns="0" bIns="0" rtlCol="0" anchor="ctr"/>
-          <a:lstStyle/>
-          <a:p>
-            <a:pPr indent="0" marL="0">
-              <a:lnSpc>
-                <a:spcPct val="115000"/>
-              </a:lnSpc>
-              <a:buNone/>
-            </a:pPr>
-            <a:r>
-              <a:rPr lang="en-US" sz="800" dirty="0">
-                <a:solidFill>
-                  <a:srgbClr val="1B2740"/>
-                </a:solidFill>
-                <a:latin typeface="Malgun Gothic" pitchFamily="34" charset="0"/>
-                <a:ea typeface="Malgun Gothic" pitchFamily="34" charset="-122"/>
-                <a:cs typeface="Malgun Gothic" pitchFamily="34" charset="-120"/>
-              </a:rPr>
-              <a:t>LSAM ABM</a:t>
-            </a:r>
-            <a:endParaRPr lang="en-US" sz="800" dirty="0"/>
-          </a:p>
-        </p:txBody>
-      </p:sp>
-      <p:pic>
-        <p:nvPicPr>
-          <p:cNvPr id="15" name="Image 2" descr="preencoded.png">    </p:cNvPr>
-          <p:cNvPicPr>
-            <a:picLocks noChangeAspect="1"/>
-          </p:cNvPicPr>
-          <p:nvPr/>
-        </p:nvPicPr>
-        <p:blipFill>
-          <a:blip r:embed="rId3"/>
-          <a:stretch>
-            <a:fillRect/>
-          </a:stretch>
-        </p:blipFill>
-        <p:spPr>
-          <a:xfrm>
-            <a:off x="4448794" y="3127248"/>
-            <a:ext cx="603504" cy="603504"/>
-          </a:xfrm>
-          <a:prstGeom prst="rect">
-            <a:avLst/>
-          </a:prstGeom>
-        </p:spPr>
-      </p:pic>
-      <p:sp>
-        <p:nvSpPr>
-          <p:cNvPr id="16" name="Text 11"/>
-          <p:cNvSpPr txBox="1"/>
-          <p:nvPr/>
-        </p:nvSpPr>
-        <p:spPr>
-          <a:xfrm>
-            <a:off x="2816352" y="4206240"/>
-            <a:ext cx="1748988" cy="384048"/>
-          </a:xfrm>
-          <a:prstGeom prst="rect">
-            <a:avLst/>
-          </a:prstGeom>
-          <a:noFill/>
-          <a:ln/>
-        </p:spPr>
-        <p:txBody>
-          <a:bodyPr wrap="square" lIns="0" tIns="0" rIns="0" bIns="0" rtlCol="0" anchor="ctr"/>
-          <a:lstStyle/>
-          <a:p>
-            <a:pPr indent="0" marL="0">
-              <a:lnSpc>
-                <a:spcPct val="115000"/>
-              </a:lnSpc>
-              <a:buNone/>
-            </a:pPr>
-            <a:r>
-              <a:rPr lang="en-US" sz="800" dirty="0">
-                <a:solidFill>
-                  <a:srgbClr val="1B2740"/>
-                </a:solidFill>
-                <a:latin typeface="Malgun Gothic" pitchFamily="34" charset="0"/>
-                <a:ea typeface="Malgun Gothic" pitchFamily="34" charset="-122"/>
-                <a:cs typeface="Malgun Gothic" pitchFamily="34" charset="-120"/>
-              </a:rPr>
-              <a:t>LAMD</a:t>
-            </a:r>
-            <a:endParaRPr lang="en-US" sz="800" dirty="0"/>
-          </a:p>
-        </p:txBody>
-      </p:sp>
-      <p:pic>
-        <p:nvPicPr>
-          <p:cNvPr id="17" name="Image 3" descr="preencoded.png">    </p:cNvPr>
-          <p:cNvPicPr>
-            <a:picLocks noChangeAspect="1"/>
-          </p:cNvPicPr>
-          <p:nvPr/>
-        </p:nvPicPr>
-        <p:blipFill>
-          <a:blip r:embed="rId4"/>
-          <a:stretch>
-            <a:fillRect/>
-          </a:stretch>
-        </p:blipFill>
-        <p:spPr>
-          <a:xfrm>
-            <a:off x="4448794" y="4498848"/>
-            <a:ext cx="603504" cy="603504"/>
-          </a:xfrm>
-          <a:prstGeom prst="rect">
-            <a:avLst/>
-          </a:prstGeom>
-        </p:spPr>
-      </p:pic>
-      <p:sp>
-        <p:nvSpPr>
-          <p:cNvPr id="18" name="Text 12"/>
-          <p:cNvSpPr txBox="1"/>
-          <p:nvPr/>
-        </p:nvSpPr>
-        <p:spPr>
-          <a:xfrm>
-            <a:off x="2816352" y="5577840"/>
-            <a:ext cx="1748988" cy="384048"/>
-          </a:xfrm>
-          <a:prstGeom prst="rect">
-            <a:avLst/>
-          </a:prstGeom>
-          <a:noFill/>
-          <a:ln/>
-        </p:spPr>
-        <p:txBody>
-          <a:bodyPr wrap="square" lIns="0" tIns="0" rIns="0" bIns="0" rtlCol="0" anchor="ctr"/>
-          <a:lstStyle/>
-          <a:p>
-            <a:pPr indent="0" marL="0">
-              <a:lnSpc>
-                <a:spcPct val="115000"/>
-              </a:lnSpc>
-              <a:buNone/>
-            </a:pPr>
-            <a:r>
-              <a:rPr lang="en-US" sz="800" dirty="0">
-                <a:solidFill>
-                  <a:srgbClr val="1B2740"/>
-                </a:solidFill>
-                <a:latin typeface="Malgun Gothic" pitchFamily="34" charset="0"/>
-                <a:ea typeface="Malgun Gothic" pitchFamily="34" charset="-122"/>
-                <a:cs typeface="Malgun Gothic" pitchFamily="34" charset="-120"/>
-              </a:rPr>
-              <a:t>해궁</a:t>
-            </a:r>
-            <a:endParaRPr lang="en-US" sz="800" dirty="0"/>
-          </a:p>
-        </p:txBody>
-      </p:sp>
-      <p:pic>
-        <p:nvPicPr>
-          <p:cNvPr id="19" name="Image 4" descr="preencoded.png">    </p:cNvPr>
-          <p:cNvPicPr>
-            <a:picLocks noChangeAspect="1"/>
-          </p:cNvPicPr>
-          <p:nvPr/>
-        </p:nvPicPr>
-        <p:blipFill>
-          <a:blip r:embed="rId5"/>
-          <a:stretch>
-            <a:fillRect/>
-          </a:stretch>
-        </p:blipFill>
-        <p:spPr>
-          <a:xfrm>
-            <a:off x="4448794" y="5870448"/>
-            <a:ext cx="603504" cy="603504"/>
-          </a:xfrm>
-          <a:prstGeom prst="rect">
-            <a:avLst/>
-          </a:prstGeom>
-        </p:spPr>
-      </p:pic>
-      <p:sp>
-        <p:nvSpPr>
-          <p:cNvPr id="20" name="Text 13"/>
-          <p:cNvSpPr txBox="1"/>
-          <p:nvPr/>
-        </p:nvSpPr>
-        <p:spPr>
-          <a:xfrm>
-            <a:off x="5996330" y="91440"/>
-            <a:ext cx="1748988" cy="384048"/>
-          </a:xfrm>
-          <a:prstGeom prst="rect">
-            <a:avLst/>
-          </a:prstGeom>
-          <a:noFill/>
-          <a:ln/>
-        </p:spPr>
-        <p:txBody>
-          <a:bodyPr wrap="square" lIns="0" tIns="0" rIns="0" bIns="0" rtlCol="0" anchor="ctr"/>
-          <a:lstStyle/>
-          <a:p>
-            <a:pPr indent="0" marL="0">
-              <a:lnSpc>
-                <a:spcPct val="115000"/>
-              </a:lnSpc>
-              <a:buNone/>
-            </a:pPr>
-            <a:r>
-              <a:rPr lang="en-US" sz="800" dirty="0">
-                <a:solidFill>
-                  <a:srgbClr val="1B2740"/>
-                </a:solidFill>
-                <a:latin typeface="Malgun Gothic" pitchFamily="34" charset="0"/>
-                <a:ea typeface="Malgun Gothic" pitchFamily="34" charset="-122"/>
-                <a:cs typeface="Malgun Gothic" pitchFamily="34" charset="-120"/>
-              </a:rPr>
-              <a:t>홍상어</a:t>
-            </a:r>
-            <a:endParaRPr lang="en-US" sz="800" dirty="0"/>
-          </a:p>
-        </p:txBody>
-      </p:sp>
-      <p:pic>
-        <p:nvPicPr>
-          <p:cNvPr id="21" name="Image 5" descr="preencoded.png">    </p:cNvPr>
-          <p:cNvPicPr>
-            <a:picLocks noChangeAspect="1"/>
-          </p:cNvPicPr>
-          <p:nvPr/>
-        </p:nvPicPr>
-        <p:blipFill>
-          <a:blip r:embed="rId6"/>
-          <a:stretch>
-            <a:fillRect/>
-          </a:stretch>
-        </p:blipFill>
-        <p:spPr>
-          <a:xfrm>
-            <a:off x="7628772" y="384048"/>
-            <a:ext cx="603504" cy="603504"/>
-          </a:xfrm>
-          <a:prstGeom prst="rect">
-            <a:avLst/>
-          </a:prstGeom>
-        </p:spPr>
-      </p:pic>
-      <p:sp>
-        <p:nvSpPr>
-          <p:cNvPr id="22" name="Text 14"/>
-          <p:cNvSpPr txBox="1"/>
-          <p:nvPr/>
-        </p:nvSpPr>
-        <p:spPr>
-          <a:xfrm>
-            <a:off x="5996330" y="1463040"/>
-            <a:ext cx="1748988" cy="384048"/>
-          </a:xfrm>
-          <a:prstGeom prst="rect">
-            <a:avLst/>
-          </a:prstGeom>
-          <a:noFill/>
-          <a:ln/>
-        </p:spPr>
-        <p:txBody>
-          <a:bodyPr wrap="square" lIns="0" tIns="0" rIns="0" bIns="0" rtlCol="0" anchor="ctr"/>
-          <a:lstStyle/>
-          <a:p>
-            <a:pPr indent="0" marL="0">
-              <a:lnSpc>
-                <a:spcPct val="115000"/>
-              </a:lnSpc>
-              <a:buNone/>
-            </a:pPr>
-            <a:r>
-              <a:rPr lang="en-US" sz="800" dirty="0">
-                <a:solidFill>
-                  <a:srgbClr val="1B2740"/>
-                </a:solidFill>
-                <a:latin typeface="Malgun Gothic" pitchFamily="34" charset="0"/>
-                <a:ea typeface="Malgun Gothic" pitchFamily="34" charset="-122"/>
-                <a:cs typeface="Malgun Gothic" pitchFamily="34" charset="-120"/>
-              </a:rPr>
-              <a:t>천궁 발사차량</a:t>
-            </a:r>
-            <a:endParaRPr lang="en-US" sz="800" dirty="0"/>
-          </a:p>
-        </p:txBody>
-      </p:sp>
-      <p:pic>
-        <p:nvPicPr>
-          <p:cNvPr id="23" name="Image 6" descr="preencoded.png">    </p:cNvPr>
-          <p:cNvPicPr>
-            <a:picLocks noChangeAspect="1"/>
-          </p:cNvPicPr>
-          <p:nvPr/>
-        </p:nvPicPr>
-        <p:blipFill>
-          <a:blip r:embed="rId7"/>
-          <a:stretch>
-            <a:fillRect/>
-          </a:stretch>
-        </p:blipFill>
-        <p:spPr>
-          <a:xfrm>
-            <a:off x="7628772" y="1755648"/>
-            <a:ext cx="603504" cy="603504"/>
-          </a:xfrm>
-          <a:prstGeom prst="rect">
-            <a:avLst/>
-          </a:prstGeom>
-        </p:spPr>
-      </p:pic>
-      <p:sp>
-        <p:nvSpPr>
-          <p:cNvPr id="24" name="Text 15"/>
-          <p:cNvSpPr txBox="1"/>
-          <p:nvPr/>
-        </p:nvSpPr>
-        <p:spPr>
-          <a:xfrm>
-            <a:off x="5996330" y="2834640"/>
-            <a:ext cx="1748988" cy="384048"/>
-          </a:xfrm>
-          <a:prstGeom prst="rect">
-            <a:avLst/>
-          </a:prstGeom>
-          <a:noFill/>
-          <a:ln/>
-        </p:spPr>
-        <p:txBody>
-          <a:bodyPr wrap="square" lIns="0" tIns="0" rIns="0" bIns="0" rtlCol="0" anchor="ctr"/>
-          <a:lstStyle/>
-          <a:p>
-            <a:pPr indent="0" marL="0">
-              <a:lnSpc>
-                <a:spcPct val="115000"/>
-              </a:lnSpc>
-              <a:buNone/>
-            </a:pPr>
-            <a:r>
-              <a:rPr lang="en-US" sz="800" dirty="0">
-                <a:solidFill>
-                  <a:srgbClr val="1B2740"/>
-                </a:solidFill>
-                <a:latin typeface="Malgun Gothic" pitchFamily="34" charset="0"/>
-                <a:ea typeface="Malgun Gothic" pitchFamily="34" charset="-122"/>
-                <a:cs typeface="Malgun Gothic" pitchFamily="34" charset="-120"/>
-              </a:rPr>
-              <a:t>천궁 MFR차량</a:t>
-            </a:r>
-            <a:endParaRPr lang="en-US" sz="800" dirty="0"/>
-          </a:p>
-        </p:txBody>
-      </p:sp>
-      <p:pic>
-        <p:nvPicPr>
-          <p:cNvPr id="25" name="Image 7" descr="preencoded.png">    </p:cNvPr>
-          <p:cNvPicPr>
-            <a:picLocks noChangeAspect="1"/>
-          </p:cNvPicPr>
-          <p:nvPr/>
-        </p:nvPicPr>
-        <p:blipFill>
-          <a:blip r:embed="rId8"/>
-          <a:stretch>
-            <a:fillRect/>
-          </a:stretch>
-        </p:blipFill>
-        <p:spPr>
-          <a:xfrm>
-            <a:off x="7628772" y="3127248"/>
-            <a:ext cx="603504" cy="603504"/>
-          </a:xfrm>
-          <a:prstGeom prst="rect">
-            <a:avLst/>
-          </a:prstGeom>
-        </p:spPr>
-      </p:pic>
-      <p:sp>
-        <p:nvSpPr>
-          <p:cNvPr id="26" name="Text 16"/>
-          <p:cNvSpPr txBox="1"/>
-          <p:nvPr/>
-        </p:nvSpPr>
-        <p:spPr>
-          <a:xfrm>
-            <a:off x="5996330" y="4206240"/>
-            <a:ext cx="1748988" cy="384048"/>
-          </a:xfrm>
-          <a:prstGeom prst="rect">
-            <a:avLst/>
-          </a:prstGeom>
-          <a:noFill/>
-          <a:ln/>
-        </p:spPr>
-        <p:txBody>
-          <a:bodyPr wrap="square" lIns="0" tIns="0" rIns="0" bIns="0" rtlCol="0" anchor="ctr"/>
-          <a:lstStyle/>
-          <a:p>
-            <a:pPr indent="0" marL="0">
-              <a:lnSpc>
-                <a:spcPct val="115000"/>
-              </a:lnSpc>
-              <a:buNone/>
-            </a:pPr>
-            <a:r>
-              <a:rPr lang="en-US" sz="800" dirty="0">
-                <a:solidFill>
-                  <a:srgbClr val="1B2740"/>
-                </a:solidFill>
-                <a:latin typeface="Malgun Gothic" pitchFamily="34" charset="0"/>
-                <a:ea typeface="Malgun Gothic" pitchFamily="34" charset="-122"/>
-                <a:cs typeface="Malgun Gothic" pitchFamily="34" charset="-120"/>
-              </a:rPr>
-              <a:t>천궁</a:t>
-            </a:r>
-            <a:endParaRPr lang="en-US" sz="800" dirty="0"/>
-          </a:p>
-          <a:p>
-            <a:pPr indent="0" marL="0">
-              <a:lnSpc>
-                <a:spcPct val="115000"/>
-              </a:lnSpc>
-              <a:buNone/>
-            </a:pPr>
-            <a:r>
-              <a:rPr lang="en-US" sz="800" dirty="0">
-                <a:solidFill>
-                  <a:srgbClr val="1B2740"/>
-                </a:solidFill>
-                <a:latin typeface="Malgun Gothic" pitchFamily="34" charset="0"/>
-                <a:ea typeface="Malgun Gothic" pitchFamily="34" charset="-122"/>
-                <a:cs typeface="Malgun Gothic" pitchFamily="34" charset="-120"/>
-              </a:rPr>
-              <a:t>지휘통제차량</a:t>
-            </a:r>
-            <a:endParaRPr lang="en-US" sz="800" dirty="0"/>
-          </a:p>
-        </p:txBody>
-      </p:sp>
-      <p:pic>
-        <p:nvPicPr>
-          <p:cNvPr id="27" name="Image 8" descr="preencoded.png">    </p:cNvPr>
-          <p:cNvPicPr>
-            <a:picLocks noChangeAspect="1"/>
-          </p:cNvPicPr>
-          <p:nvPr/>
-        </p:nvPicPr>
-        <p:blipFill>
-          <a:blip r:embed="rId9"/>
-          <a:stretch>
-            <a:fillRect/>
-          </a:stretch>
-        </p:blipFill>
-        <p:spPr>
-          <a:xfrm>
-            <a:off x="7628772" y="4498848"/>
-            <a:ext cx="603504" cy="603504"/>
-          </a:xfrm>
-          <a:prstGeom prst="rect">
-            <a:avLst/>
-          </a:prstGeom>
-        </p:spPr>
-      </p:pic>
-      <p:sp>
-        <p:nvSpPr>
-          <p:cNvPr id="28" name="Text 17"/>
-          <p:cNvSpPr txBox="1"/>
-          <p:nvPr/>
-        </p:nvSpPr>
-        <p:spPr>
-          <a:xfrm>
-            <a:off x="5996330" y="5577840"/>
-            <a:ext cx="1748988" cy="384048"/>
-          </a:xfrm>
-          <a:prstGeom prst="rect">
-            <a:avLst/>
-          </a:prstGeom>
-          <a:noFill/>
-          <a:ln/>
-        </p:spPr>
-        <p:txBody>
-          <a:bodyPr wrap="square" lIns="0" tIns="0" rIns="0" bIns="0" rtlCol="0" anchor="ctr"/>
-          <a:lstStyle/>
-          <a:p>
-            <a:pPr indent="0" marL="0">
-              <a:lnSpc>
-                <a:spcPct val="115000"/>
-              </a:lnSpc>
-              <a:buNone/>
-            </a:pPr>
-            <a:r>
-              <a:rPr lang="en-US" sz="800" dirty="0">
-                <a:solidFill>
-                  <a:srgbClr val="1B2740"/>
-                </a:solidFill>
-                <a:latin typeface="Malgun Gothic" pitchFamily="34" charset="0"/>
-                <a:ea typeface="Malgun Gothic" pitchFamily="34" charset="-122"/>
-                <a:cs typeface="Malgun Gothic" pitchFamily="34" charset="-120"/>
-              </a:rPr>
-              <a:t>CIWS-II</a:t>
-            </a:r>
-            <a:endParaRPr lang="en-US" sz="800" dirty="0"/>
-          </a:p>
-        </p:txBody>
-      </p:sp>
-      <p:pic>
-        <p:nvPicPr>
-          <p:cNvPr id="29" name="Image 9" descr="preencoded.png">    </p:cNvPr>
-          <p:cNvPicPr>
-            <a:picLocks noChangeAspect="1"/>
-          </p:cNvPicPr>
-          <p:nvPr/>
-        </p:nvPicPr>
-        <p:blipFill>
-          <a:blip r:embed="rId10"/>
-          <a:stretch>
-            <a:fillRect/>
-          </a:stretch>
-        </p:blipFill>
-        <p:spPr>
-          <a:xfrm>
-            <a:off x="7628772" y="5870448"/>
-            <a:ext cx="603504" cy="603504"/>
-          </a:xfrm>
-          <a:prstGeom prst="rect">
-            <a:avLst/>
-          </a:prstGeom>
-        </p:spPr>
-      </p:pic>
-      <p:sp>
-        <p:nvSpPr>
-          <p:cNvPr id="30" name="Text 18"/>
-          <p:cNvSpPr txBox="1"/>
-          <p:nvPr/>
-        </p:nvSpPr>
-        <p:spPr>
-          <a:xfrm>
-            <a:off x="9176309" y="91440"/>
-            <a:ext cx="1748988" cy="384048"/>
-          </a:xfrm>
-          <a:prstGeom prst="rect">
-            <a:avLst/>
-          </a:prstGeom>
-          <a:noFill/>
-          <a:ln/>
-        </p:spPr>
-        <p:txBody>
-          <a:bodyPr wrap="square" lIns="0" tIns="0" rIns="0" bIns="0" rtlCol="0" anchor="ctr"/>
-          <a:lstStyle/>
-          <a:p>
-            <a:pPr indent="0" marL="0">
-              <a:lnSpc>
-                <a:spcPct val="115000"/>
-              </a:lnSpc>
-              <a:buNone/>
-            </a:pPr>
-            <a:r>
-              <a:rPr lang="en-US" sz="800" dirty="0">
-                <a:solidFill>
-                  <a:srgbClr val="1B2740"/>
-                </a:solidFill>
-                <a:latin typeface="Malgun Gothic" pitchFamily="34" charset="0"/>
-                <a:ea typeface="Malgun Gothic" pitchFamily="34" charset="-122"/>
-                <a:cs typeface="Malgun Gothic" pitchFamily="34" charset="-120"/>
-              </a:rPr>
-              <a:t>KF21</a:t>
-            </a:r>
-            <a:endParaRPr lang="en-US" sz="800" dirty="0"/>
-          </a:p>
-        </p:txBody>
-      </p:sp>
-      <p:pic>
-        <p:nvPicPr>
-          <p:cNvPr id="31" name="Image 10" descr="preencoded.png">    </p:cNvPr>
-          <p:cNvPicPr>
-            <a:picLocks noChangeAspect="1"/>
-          </p:cNvPicPr>
-          <p:nvPr/>
-        </p:nvPicPr>
-        <p:blipFill>
-          <a:blip r:embed="rId11"/>
-          <a:stretch>
-            <a:fillRect/>
-          </a:stretch>
-        </p:blipFill>
-        <p:spPr>
-          <a:xfrm>
-            <a:off x="10808751" y="384048"/>
-            <a:ext cx="603504" cy="603504"/>
-          </a:xfrm>
-          <a:prstGeom prst="rect">
-            <a:avLst/>
-          </a:prstGeom>
-        </p:spPr>
-      </p:pic>
-      <p:sp>
-        <p:nvSpPr>
-          <p:cNvPr id="32" name="Text 19"/>
-          <p:cNvSpPr txBox="1"/>
-          <p:nvPr/>
-        </p:nvSpPr>
-        <p:spPr>
-          <a:xfrm>
-            <a:off x="9176309" y="1463040"/>
-            <a:ext cx="1748988" cy="384048"/>
-          </a:xfrm>
-          <a:prstGeom prst="rect">
-            <a:avLst/>
-          </a:prstGeom>
-          <a:noFill/>
-          <a:ln/>
-        </p:spPr>
-        <p:txBody>
-          <a:bodyPr wrap="square" lIns="0" tIns="0" rIns="0" bIns="0" rtlCol="0" anchor="ctr"/>
-          <a:lstStyle/>
-          <a:p>
-            <a:pPr indent="0" marL="0">
-              <a:lnSpc>
-                <a:spcPct val="115000"/>
-              </a:lnSpc>
-              <a:buNone/>
-            </a:pPr>
-            <a:r>
-              <a:rPr lang="en-US" sz="800" dirty="0">
-                <a:solidFill>
-                  <a:srgbClr val="1B2740"/>
-                </a:solidFill>
-                <a:latin typeface="Malgun Gothic" pitchFamily="34" charset="0"/>
-                <a:ea typeface="Malgun Gothic" pitchFamily="34" charset="-122"/>
-                <a:cs typeface="Malgun Gothic" pitchFamily="34" charset="-120"/>
-              </a:rPr>
-              <a:t>KDDX</a:t>
-            </a:r>
-            <a:endParaRPr lang="en-US" sz="800" dirty="0"/>
-          </a:p>
-        </p:txBody>
-      </p:sp>
-      <p:pic>
-        <p:nvPicPr>
-          <p:cNvPr id="33" name="Image 11" descr="preencoded.png">    </p:cNvPr>
-          <p:cNvPicPr>
-            <a:picLocks noChangeAspect="1"/>
-          </p:cNvPicPr>
-          <p:nvPr/>
-        </p:nvPicPr>
-        <p:blipFill>
-          <a:blip r:embed="rId12"/>
-          <a:stretch>
-            <a:fillRect/>
-          </a:stretch>
-        </p:blipFill>
-        <p:spPr>
-          <a:xfrm>
-            <a:off x="10808751" y="1755648"/>
-            <a:ext cx="603504" cy="603504"/>
-          </a:xfrm>
-          <a:prstGeom prst="rect">
-            <a:avLst/>
-          </a:prstGeom>
-        </p:spPr>
-      </p:pic>
-      <p:sp>
-        <p:nvSpPr>
-          <p:cNvPr id="34" name="Text 20"/>
-          <p:cNvSpPr txBox="1"/>
-          <p:nvPr/>
-        </p:nvSpPr>
-        <p:spPr>
-          <a:xfrm>
-            <a:off x="9176309" y="2834640"/>
-            <a:ext cx="1748988" cy="384048"/>
-          </a:xfrm>
-          <a:prstGeom prst="rect">
-            <a:avLst/>
-          </a:prstGeom>
-          <a:noFill/>
-          <a:ln/>
-        </p:spPr>
-        <p:txBody>
-          <a:bodyPr wrap="square" lIns="0" tIns="0" rIns="0" bIns="0" rtlCol="0" anchor="ctr"/>
-          <a:lstStyle/>
-          <a:p>
-            <a:pPr indent="0" marL="0">
-              <a:lnSpc>
-                <a:spcPct val="115000"/>
-              </a:lnSpc>
-              <a:buNone/>
-            </a:pPr>
-            <a:r>
-              <a:rPr lang="en-US" sz="800" dirty="0">
-                <a:solidFill>
-                  <a:srgbClr val="1B2740"/>
-                </a:solidFill>
-                <a:latin typeface="Malgun Gothic" pitchFamily="34" charset="0"/>
-                <a:ea typeface="Malgun Gothic" pitchFamily="34" charset="-122"/>
-                <a:cs typeface="Malgun Gothic" pitchFamily="34" charset="-120"/>
-              </a:rPr>
-              <a:t>정찰용무인</a:t>
-            </a:r>
-            <a:endParaRPr lang="en-US" sz="800" dirty="0"/>
-          </a:p>
-          <a:p>
-            <a:pPr indent="0" marL="0">
-              <a:lnSpc>
-                <a:spcPct val="115000"/>
-              </a:lnSpc>
-              <a:buNone/>
-            </a:pPr>
-            <a:r>
-              <a:rPr lang="en-US" sz="800" dirty="0">
-                <a:solidFill>
-                  <a:srgbClr val="1B2740"/>
-                </a:solidFill>
-                <a:latin typeface="Malgun Gothic" pitchFamily="34" charset="0"/>
-                <a:ea typeface="Malgun Gothic" pitchFamily="34" charset="-122"/>
-                <a:cs typeface="Malgun Gothic" pitchFamily="34" charset="-120"/>
-              </a:rPr>
-              <a:t>수상정</a:t>
-            </a:r>
-            <a:endParaRPr lang="en-US" sz="800" dirty="0"/>
-          </a:p>
-        </p:txBody>
-      </p:sp>
-      <p:pic>
-        <p:nvPicPr>
-          <p:cNvPr id="35" name="Image 12" descr="preencoded.png">    </p:cNvPr>
-          <p:cNvPicPr>
-            <a:picLocks noChangeAspect="1"/>
-          </p:cNvPicPr>
-          <p:nvPr/>
-        </p:nvPicPr>
-        <p:blipFill>
-          <a:blip r:embed="rId13"/>
-          <a:stretch>
-            <a:fillRect/>
-          </a:stretch>
-        </p:blipFill>
-        <p:spPr>
-          <a:xfrm>
-            <a:off x="10808751" y="3127248"/>
-            <a:ext cx="603504" cy="603504"/>
-          </a:xfrm>
-          <a:prstGeom prst="rect">
-            <a:avLst/>
-          </a:prstGeom>
-        </p:spPr>
-      </p:pic>
-      <p:sp>
-        <p:nvSpPr>
-          <p:cNvPr id="36" name="Text 21"/>
-          <p:cNvSpPr txBox="1"/>
-          <p:nvPr/>
-        </p:nvSpPr>
-        <p:spPr>
-          <a:xfrm>
-            <a:off x="9176309" y="4206240"/>
-            <a:ext cx="1748988" cy="384048"/>
-          </a:xfrm>
-          <a:prstGeom prst="rect">
-            <a:avLst/>
-          </a:prstGeom>
-          <a:noFill/>
-          <a:ln/>
-        </p:spPr>
-        <p:txBody>
-          <a:bodyPr wrap="square" lIns="0" tIns="0" rIns="0" bIns="0" rtlCol="0" anchor="ctr"/>
-          <a:lstStyle/>
-          <a:p>
-            <a:pPr indent="0" marL="0">
-              <a:lnSpc>
-                <a:spcPct val="115000"/>
-              </a:lnSpc>
-              <a:buNone/>
-            </a:pPr>
-            <a:r>
-              <a:rPr lang="en-US" sz="800" dirty="0">
-                <a:solidFill>
-                  <a:srgbClr val="1B2740"/>
-                </a:solidFill>
-                <a:latin typeface="Malgun Gothic" pitchFamily="34" charset="0"/>
-                <a:ea typeface="Malgun Gothic" pitchFamily="34" charset="-122"/>
-                <a:cs typeface="Malgun Gothic" pitchFamily="34" charset="-120"/>
-              </a:rPr>
-              <a:t>자폭용무인</a:t>
-            </a:r>
-            <a:endParaRPr lang="en-US" sz="800" dirty="0"/>
-          </a:p>
-          <a:p>
-            <a:pPr indent="0" marL="0">
-              <a:lnSpc>
-                <a:spcPct val="115000"/>
-              </a:lnSpc>
-              <a:buNone/>
-            </a:pPr>
-            <a:r>
-              <a:rPr lang="en-US" sz="800" dirty="0">
-                <a:solidFill>
-                  <a:srgbClr val="1B2740"/>
-                </a:solidFill>
-                <a:latin typeface="Malgun Gothic" pitchFamily="34" charset="0"/>
-                <a:ea typeface="Malgun Gothic" pitchFamily="34" charset="-122"/>
-                <a:cs typeface="Malgun Gothic" pitchFamily="34" charset="-120"/>
-              </a:rPr>
-              <a:t>수상정</a:t>
-            </a:r>
-            <a:endParaRPr lang="en-US" sz="800" dirty="0"/>
-          </a:p>
-        </p:txBody>
-      </p:sp>
-      <p:pic>
-        <p:nvPicPr>
-          <p:cNvPr id="37" name="Image 13" descr="preencoded.png">    </p:cNvPr>
-          <p:cNvPicPr>
-            <a:picLocks noChangeAspect="1"/>
-          </p:cNvPicPr>
-          <p:nvPr/>
-        </p:nvPicPr>
-        <p:blipFill>
-          <a:blip r:embed="rId14"/>
-          <a:stretch>
-            <a:fillRect/>
-          </a:stretch>
-        </p:blipFill>
-        <p:spPr>
-          <a:xfrm>
-            <a:off x="10808751" y="4498848"/>
-            <a:ext cx="603504" cy="603504"/>
-          </a:xfrm>
-          <a:prstGeom prst="rect">
-            <a:avLst/>
-          </a:prstGeom>
-        </p:spPr>
-      </p:pic>
-      <p:sp>
-        <p:nvSpPr>
-          <p:cNvPr id="38" name="Text 22"/>
-          <p:cNvSpPr txBox="1"/>
-          <p:nvPr/>
-        </p:nvSpPr>
-        <p:spPr>
-          <a:xfrm>
-            <a:off x="9176309" y="5577840"/>
-            <a:ext cx="1748988" cy="384048"/>
-          </a:xfrm>
-          <a:prstGeom prst="rect">
-            <a:avLst/>
-          </a:prstGeom>
-          <a:noFill/>
-          <a:ln/>
-        </p:spPr>
-        <p:txBody>
-          <a:bodyPr wrap="square" lIns="0" tIns="0" rIns="0" bIns="0" rtlCol="0" anchor="ctr"/>
-          <a:lstStyle/>
-          <a:p>
-            <a:pPr indent="0" marL="0">
-              <a:lnSpc>
-                <a:spcPct val="115000"/>
-              </a:lnSpc>
-              <a:buNone/>
-            </a:pPr>
-            <a:r>
-              <a:rPr lang="en-US" sz="800" dirty="0">
-                <a:solidFill>
-                  <a:srgbClr val="1B2740"/>
-                </a:solidFill>
-                <a:latin typeface="Malgun Gothic" pitchFamily="34" charset="0"/>
-                <a:ea typeface="Malgun Gothic" pitchFamily="34" charset="-122"/>
-                <a:cs typeface="Malgun Gothic" pitchFamily="34" charset="-120"/>
-              </a:rPr>
-              <a:t>AUV</a:t>
-            </a:r>
-            <a:endParaRPr lang="en-US" sz="800" dirty="0"/>
-          </a:p>
-        </p:txBody>
-      </p:sp>
-      <p:pic>
-        <p:nvPicPr>
-          <p:cNvPr id="39" name="Image 14" descr="preencoded.png">    </p:cNvPr>
-          <p:cNvPicPr>
-            <a:picLocks noChangeAspect="1"/>
-          </p:cNvPicPr>
-          <p:nvPr/>
-        </p:nvPicPr>
-        <p:blipFill>
-          <a:blip r:embed="rId15"/>
-          <a:stretch>
-            <a:fillRect/>
-          </a:stretch>
-        </p:blipFill>
-        <p:spPr>
-          <a:xfrm>
-            <a:off x="10808751" y="5870448"/>
-            <a:ext cx="603504" cy="603504"/>
-          </a:xfrm>
-          <a:prstGeom prst="rect">
-            <a:avLst/>
-          </a:prstGeom>
-        </p:spPr>
-      </p:pic>
-    </p:spTree>
-  </p:cSld>
-  <p:clrMapOvr>
-    <a:masterClrMapping/>
-  </p:clrMapOvr>
-</p:sld>
-</file>
-
-<file path=ppt/slides/slide11.xml><?xml version="1.0" encoding="utf-8"?>
-<p:sld xmlns:a="http://schemas.openxmlformats.org/drawingml/2006/main" xmlns:r="http://schemas.openxmlformats.org/officeDocument/2006/relationships" xmlns:p="http://schemas.openxmlformats.org/presentationml/2006/main">
-  <p:cSld name="Slide 11">
-    <p:bg>
-      <p:bgPr>
-        <a:solidFill>
-          <a:srgbClr val="FFFFFF"/>
-        </a:solidFill>
-      </p:bgPr>
-    </p:bg>
-    <p:spTree>
-      <p:nvGrpSpPr>
-        <p:cNvPr id="1" name=""/>
-        <p:cNvGrpSpPr/>
-        <p:nvPr/>
-      </p:nvGrpSpPr>
-      <p:grpSpPr>
-        <a:xfrm>
-          <a:off x="0" y="0"/>
-          <a:ext cx="0" cy="0"/>
-          <a:chOff x="0" y="0"/>
-          <a:chExt cx="0" cy="0"/>
-        </a:xfrm>
-      </p:grpSpPr>
-      <p:sp>
-        <p:nvSpPr>
-          <p:cNvPr id="2" name="Shape 0"/>
-          <p:cNvSpPr/>
-          <p:nvPr/>
-        </p:nvSpPr>
-        <p:spPr>
-          <a:xfrm>
-            <a:off x="0" y="0"/>
-            <a:ext cx="2651760" cy="3429000"/>
-          </a:xfrm>
-          <a:prstGeom prst="rect">
-            <a:avLst/>
-          </a:prstGeom>
-          <a:solidFill>
-            <a:srgbClr val="1E2C4F"/>
-          </a:solidFill>
-          <a:ln w="12700">
-            <a:solidFill>
-              <a:srgbClr val="1E2C4F"/>
-            </a:solidFill>
-            <a:prstDash val="solid"/>
-          </a:ln>
-        </p:spPr>
-      </p:sp>
-      <p:sp>
-        <p:nvSpPr>
-          <p:cNvPr id="3" name="Shape 1"/>
-          <p:cNvSpPr/>
-          <p:nvPr/>
-        </p:nvSpPr>
-        <p:spPr>
-          <a:xfrm>
-            <a:off x="5831738" y="0"/>
-            <a:ext cx="0" cy="6858000"/>
-          </a:xfrm>
-          <a:prstGeom prst="line">
-            <a:avLst/>
-          </a:prstGeom>
-          <a:noFill/>
-          <a:ln w="7620">
-            <a:solidFill>
-              <a:srgbClr val="D2D9E5"/>
-            </a:solidFill>
-            <a:prstDash val="solid"/>
-          </a:ln>
-        </p:spPr>
-      </p:sp>
-      <p:sp>
-        <p:nvSpPr>
-          <p:cNvPr id="4" name="Shape 2"/>
-          <p:cNvSpPr/>
-          <p:nvPr/>
-        </p:nvSpPr>
-        <p:spPr>
-          <a:xfrm>
-            <a:off x="9011717" y="0"/>
-            <a:ext cx="0" cy="6858000"/>
-          </a:xfrm>
-          <a:prstGeom prst="line">
-            <a:avLst/>
-          </a:prstGeom>
-          <a:noFill/>
-          <a:ln w="7620">
-            <a:solidFill>
-              <a:srgbClr val="D2D9E5"/>
-            </a:solidFill>
-            <a:prstDash val="solid"/>
-          </a:ln>
-        </p:spPr>
-      </p:sp>
-      <p:sp>
-        <p:nvSpPr>
-          <p:cNvPr id="5" name="Shape 3"/>
-          <p:cNvSpPr/>
-          <p:nvPr/>
-        </p:nvSpPr>
-        <p:spPr>
-          <a:xfrm>
-            <a:off x="2651760" y="3429000"/>
-            <a:ext cx="0" cy="3429000"/>
-          </a:xfrm>
-          <a:prstGeom prst="line">
-            <a:avLst/>
-          </a:prstGeom>
-          <a:noFill/>
-          <a:ln w="7620">
-            <a:solidFill>
-              <a:srgbClr val="D2D9E5"/>
-            </a:solidFill>
-            <a:prstDash val="solid"/>
-          </a:ln>
-        </p:spPr>
-      </p:sp>
-      <p:sp>
-        <p:nvSpPr>
-          <p:cNvPr id="6" name="Shape 4"/>
-          <p:cNvSpPr/>
-          <p:nvPr/>
-        </p:nvSpPr>
-        <p:spPr>
-          <a:xfrm>
-            <a:off x="2651760" y="1371600"/>
-            <a:ext cx="9539935" cy="0"/>
-          </a:xfrm>
-          <a:prstGeom prst="line">
-            <a:avLst/>
-          </a:prstGeom>
-          <a:noFill/>
-          <a:ln w="7620">
-            <a:solidFill>
-              <a:srgbClr val="D2D9E5"/>
-            </a:solidFill>
-            <a:prstDash val="sysDash"/>
-          </a:ln>
-        </p:spPr>
-      </p:sp>
-      <p:sp>
-        <p:nvSpPr>
-          <p:cNvPr id="7" name="Shape 5"/>
-          <p:cNvSpPr/>
-          <p:nvPr/>
-        </p:nvSpPr>
-        <p:spPr>
-          <a:xfrm>
-            <a:off x="2651760" y="2743200"/>
-            <a:ext cx="9539935" cy="0"/>
-          </a:xfrm>
-          <a:prstGeom prst="line">
-            <a:avLst/>
-          </a:prstGeom>
-          <a:noFill/>
-          <a:ln w="7620">
-            <a:solidFill>
-              <a:srgbClr val="D2D9E5"/>
-            </a:solidFill>
-            <a:prstDash val="sysDash"/>
-          </a:ln>
-        </p:spPr>
-      </p:sp>
-      <p:sp>
-        <p:nvSpPr>
-          <p:cNvPr id="8" name="Shape 6"/>
-          <p:cNvSpPr/>
-          <p:nvPr/>
-        </p:nvSpPr>
-        <p:spPr>
-          <a:xfrm>
-            <a:off x="2651760" y="4114800"/>
-            <a:ext cx="9539935" cy="0"/>
-          </a:xfrm>
-          <a:prstGeom prst="line">
-            <a:avLst/>
-          </a:prstGeom>
-          <a:noFill/>
-          <a:ln w="7620">
-            <a:solidFill>
-              <a:srgbClr val="D2D9E5"/>
-            </a:solidFill>
-            <a:prstDash val="sysDash"/>
-          </a:ln>
-        </p:spPr>
-      </p:sp>
-      <p:sp>
-        <p:nvSpPr>
-          <p:cNvPr id="9" name="Shape 7"/>
-          <p:cNvSpPr/>
-          <p:nvPr/>
-        </p:nvSpPr>
-        <p:spPr>
-          <a:xfrm>
-            <a:off x="2651760" y="5486400"/>
-            <a:ext cx="9539935" cy="0"/>
-          </a:xfrm>
-          <a:prstGeom prst="line">
-            <a:avLst/>
-          </a:prstGeom>
-          <a:noFill/>
-          <a:ln w="7620">
-            <a:solidFill>
-              <a:srgbClr val="D2D9E5"/>
-            </a:solidFill>
-            <a:prstDash val="sysDash"/>
-          </a:ln>
-        </p:spPr>
-      </p:sp>
-      <p:sp>
-        <p:nvSpPr>
-          <p:cNvPr id="10" name="Text 8"/>
-          <p:cNvSpPr txBox="1"/>
-          <p:nvPr/>
-        </p:nvSpPr>
-        <p:spPr>
-          <a:xfrm>
-            <a:off x="2816352" y="91440"/>
-            <a:ext cx="1748988" cy="384048"/>
-          </a:xfrm>
-          <a:prstGeom prst="rect">
-            <a:avLst/>
-          </a:prstGeom>
-          <a:noFill/>
-          <a:ln/>
-        </p:spPr>
-        <p:txBody>
-          <a:bodyPr wrap="square" lIns="0" tIns="0" rIns="0" bIns="0" rtlCol="0" anchor="ctr"/>
-          <a:lstStyle/>
-          <a:p>
-            <a:pPr indent="0" marL="0">
-              <a:lnSpc>
-                <a:spcPct val="115000"/>
-              </a:lnSpc>
-              <a:buNone/>
-            </a:pPr>
-            <a:r>
-              <a:rPr lang="en-US" sz="800" dirty="0">
-                <a:solidFill>
-                  <a:srgbClr val="1B2740"/>
-                </a:solidFill>
-                <a:latin typeface="Malgun Gothic" pitchFamily="34" charset="0"/>
-                <a:ea typeface="Malgun Gothic" pitchFamily="34" charset="-122"/>
-                <a:cs typeface="Malgun Gothic" pitchFamily="34" charset="-120"/>
-              </a:rPr>
-              <a:t>Lock</a:t>
-            </a:r>
-            <a:endParaRPr lang="en-US" sz="800" dirty="0"/>
-          </a:p>
-        </p:txBody>
-      </p:sp>
-      <p:pic>
-        <p:nvPicPr>
-          <p:cNvPr id="11" name="Image 0" descr="preencoded.png">    </p:cNvPr>
-          <p:cNvPicPr>
-            <a:picLocks noChangeAspect="1"/>
-          </p:cNvPicPr>
-          <p:nvPr/>
-        </p:nvPicPr>
-        <p:blipFill>
-          <a:blip r:embed="rId1"/>
-          <a:stretch>
-            <a:fillRect/>
-          </a:stretch>
-        </p:blipFill>
-        <p:spPr>
-          <a:xfrm>
-            <a:off x="4448794" y="384048"/>
-            <a:ext cx="603504" cy="603504"/>
-          </a:xfrm>
-          <a:prstGeom prst="rect">
-            <a:avLst/>
-          </a:prstGeom>
-        </p:spPr>
-      </p:pic>
-      <p:sp>
-        <p:nvSpPr>
-          <p:cNvPr id="12" name="Text 9"/>
-          <p:cNvSpPr txBox="1"/>
-          <p:nvPr/>
-        </p:nvSpPr>
-        <p:spPr>
-          <a:xfrm>
-            <a:off x="2816352" y="1463040"/>
-            <a:ext cx="1748988" cy="384048"/>
-          </a:xfrm>
-          <a:prstGeom prst="rect">
-            <a:avLst/>
-          </a:prstGeom>
-          <a:noFill/>
-          <a:ln/>
-        </p:spPr>
-        <p:txBody>
-          <a:bodyPr wrap="square" lIns="0" tIns="0" rIns="0" bIns="0" rtlCol="0" anchor="ctr"/>
-          <a:lstStyle/>
-          <a:p>
-            <a:pPr indent="0" marL="0">
-              <a:lnSpc>
-                <a:spcPct val="115000"/>
-              </a:lnSpc>
-              <a:buNone/>
-            </a:pPr>
-            <a:r>
-              <a:rPr lang="en-US" sz="800" dirty="0">
-                <a:solidFill>
-                  <a:srgbClr val="1B2740"/>
-                </a:solidFill>
-                <a:latin typeface="Malgun Gothic" pitchFamily="34" charset="0"/>
-                <a:ea typeface="Malgun Gothic" pitchFamily="34" charset="-122"/>
-                <a:cs typeface="Malgun Gothic" pitchFamily="34" charset="-120"/>
-              </a:rPr>
-              <a:t>Employee ID</a:t>
-            </a:r>
-            <a:endParaRPr lang="en-US" sz="800" dirty="0"/>
-          </a:p>
-        </p:txBody>
-      </p:sp>
-      <p:pic>
-        <p:nvPicPr>
-          <p:cNvPr id="13" name="Image 1" descr="preencoded.png">    </p:cNvPr>
-          <p:cNvPicPr>
-            <a:picLocks noChangeAspect="1"/>
-          </p:cNvPicPr>
-          <p:nvPr/>
-        </p:nvPicPr>
-        <p:blipFill>
-          <a:blip r:embed="rId2"/>
-          <a:stretch>
-            <a:fillRect/>
-          </a:stretch>
-        </p:blipFill>
-        <p:spPr>
-          <a:xfrm>
-            <a:off x="4448794" y="1755648"/>
-            <a:ext cx="603504" cy="603504"/>
-          </a:xfrm>
-          <a:prstGeom prst="rect">
-            <a:avLst/>
-          </a:prstGeom>
-        </p:spPr>
-      </p:pic>
-      <p:sp>
-        <p:nvSpPr>
-          <p:cNvPr id="14" name="Text 10"/>
-          <p:cNvSpPr txBox="1"/>
-          <p:nvPr/>
-        </p:nvSpPr>
-        <p:spPr>
-          <a:xfrm>
-            <a:off x="2816352" y="2834640"/>
-            <a:ext cx="1748988" cy="384048"/>
-          </a:xfrm>
-          <a:prstGeom prst="rect">
-            <a:avLst/>
-          </a:prstGeom>
-          <a:noFill/>
-          <a:ln/>
-        </p:spPr>
-        <p:txBody>
-          <a:bodyPr wrap="square" lIns="0" tIns="0" rIns="0" bIns="0" rtlCol="0" anchor="ctr"/>
-          <a:lstStyle/>
-          <a:p>
-            <a:pPr indent="0" marL="0">
-              <a:lnSpc>
-                <a:spcPct val="115000"/>
-              </a:lnSpc>
-              <a:buNone/>
-            </a:pPr>
-            <a:r>
-              <a:rPr lang="en-US" sz="800" dirty="0">
-                <a:solidFill>
-                  <a:srgbClr val="1B2740"/>
-                </a:solidFill>
-                <a:latin typeface="Malgun Gothic" pitchFamily="34" charset="0"/>
-                <a:ea typeface="Malgun Gothic" pitchFamily="34" charset="-122"/>
-                <a:cs typeface="Malgun Gothic" pitchFamily="34" charset="-120"/>
-              </a:rPr>
-              <a:t>Schedule</a:t>
-            </a:r>
-            <a:endParaRPr lang="en-US" sz="800" dirty="0"/>
-          </a:p>
-        </p:txBody>
-      </p:sp>
-      <p:pic>
-        <p:nvPicPr>
-          <p:cNvPr id="15" name="Image 2" descr="preencoded.png">    </p:cNvPr>
-          <p:cNvPicPr>
-            <a:picLocks noChangeAspect="1"/>
-          </p:cNvPicPr>
-          <p:nvPr/>
-        </p:nvPicPr>
-        <p:blipFill>
-          <a:blip r:embed="rId3"/>
-          <a:stretch>
-            <a:fillRect/>
-          </a:stretch>
-        </p:blipFill>
-        <p:spPr>
-          <a:xfrm>
-            <a:off x="4448794" y="3127248"/>
-            <a:ext cx="603504" cy="603504"/>
-          </a:xfrm>
-          <a:prstGeom prst="rect">
-            <a:avLst/>
-          </a:prstGeom>
-        </p:spPr>
-      </p:pic>
-      <p:sp>
-        <p:nvSpPr>
-          <p:cNvPr id="16" name="Text 11"/>
-          <p:cNvSpPr txBox="1"/>
-          <p:nvPr/>
-        </p:nvSpPr>
-        <p:spPr>
-          <a:xfrm>
-            <a:off x="2816352" y="4206240"/>
-            <a:ext cx="1748988" cy="384048"/>
-          </a:xfrm>
-          <a:prstGeom prst="rect">
-            <a:avLst/>
-          </a:prstGeom>
-          <a:noFill/>
-          <a:ln/>
-        </p:spPr>
-        <p:txBody>
-          <a:bodyPr wrap="square" lIns="0" tIns="0" rIns="0" bIns="0" rtlCol="0" anchor="ctr"/>
-          <a:lstStyle/>
-          <a:p>
-            <a:pPr indent="0" marL="0">
-              <a:lnSpc>
-                <a:spcPct val="115000"/>
-              </a:lnSpc>
-              <a:buNone/>
-            </a:pPr>
-            <a:r>
-              <a:rPr lang="en-US" sz="800" dirty="0">
-                <a:solidFill>
-                  <a:srgbClr val="1B2740"/>
-                </a:solidFill>
-                <a:latin typeface="Malgun Gothic" pitchFamily="34" charset="0"/>
-                <a:ea typeface="Malgun Gothic" pitchFamily="34" charset="-122"/>
-                <a:cs typeface="Malgun Gothic" pitchFamily="34" charset="-120"/>
-              </a:rPr>
-              <a:t>Home</a:t>
-            </a:r>
-            <a:endParaRPr lang="en-US" sz="800" dirty="0"/>
-          </a:p>
-        </p:txBody>
-      </p:sp>
-      <p:pic>
-        <p:nvPicPr>
-          <p:cNvPr id="17" name="Image 3" descr="preencoded.png">    </p:cNvPr>
-          <p:cNvPicPr>
-            <a:picLocks noChangeAspect="1"/>
-          </p:cNvPicPr>
-          <p:nvPr/>
-        </p:nvPicPr>
-        <p:blipFill>
-          <a:blip r:embed="rId4"/>
-          <a:stretch>
-            <a:fillRect/>
-          </a:stretch>
-        </p:blipFill>
-        <p:spPr>
-          <a:xfrm>
-            <a:off x="4448794" y="4498848"/>
-            <a:ext cx="603504" cy="603504"/>
-          </a:xfrm>
-          <a:prstGeom prst="rect">
-            <a:avLst/>
-          </a:prstGeom>
-        </p:spPr>
-      </p:pic>
-      <p:sp>
-        <p:nvSpPr>
-          <p:cNvPr id="18" name="Text 12"/>
-          <p:cNvSpPr txBox="1"/>
-          <p:nvPr/>
-        </p:nvSpPr>
-        <p:spPr>
-          <a:xfrm>
-            <a:off x="2816352" y="5577840"/>
-            <a:ext cx="1748988" cy="384048"/>
-          </a:xfrm>
-          <a:prstGeom prst="rect">
-            <a:avLst/>
-          </a:prstGeom>
-          <a:noFill/>
-          <a:ln/>
-        </p:spPr>
-        <p:txBody>
-          <a:bodyPr wrap="square" lIns="0" tIns="0" rIns="0" bIns="0" rtlCol="0" anchor="ctr"/>
-          <a:lstStyle/>
-          <a:p>
-            <a:pPr indent="0" marL="0">
-              <a:lnSpc>
-                <a:spcPct val="115000"/>
-              </a:lnSpc>
-              <a:buNone/>
-            </a:pPr>
-            <a:r>
-              <a:rPr lang="en-US" sz="800" dirty="0">
-                <a:solidFill>
-                  <a:srgbClr val="1B2740"/>
-                </a:solidFill>
-                <a:latin typeface="Malgun Gothic" pitchFamily="34" charset="0"/>
-                <a:ea typeface="Malgun Gothic" pitchFamily="34" charset="-122"/>
-                <a:cs typeface="Malgun Gothic" pitchFamily="34" charset="-120"/>
-              </a:rPr>
-              <a:t>Government</a:t>
-            </a:r>
-            <a:endParaRPr lang="en-US" sz="800" dirty="0"/>
-          </a:p>
-          <a:p>
-            <a:pPr indent="0" marL="0">
-              <a:lnSpc>
-                <a:spcPct val="115000"/>
-              </a:lnSpc>
-              <a:buNone/>
-            </a:pPr>
-            <a:r>
-              <a:rPr lang="en-US" sz="800" dirty="0">
-                <a:solidFill>
-                  <a:srgbClr val="1B2740"/>
-                </a:solidFill>
-                <a:latin typeface="Malgun Gothic" pitchFamily="34" charset="0"/>
-                <a:ea typeface="Malgun Gothic" pitchFamily="34" charset="-122"/>
-                <a:cs typeface="Malgun Gothic" pitchFamily="34" charset="-120"/>
-              </a:rPr>
-              <a:t>Office</a:t>
-            </a:r>
-            <a:endParaRPr lang="en-US" sz="800" dirty="0"/>
-          </a:p>
-        </p:txBody>
-      </p:sp>
-      <p:pic>
-        <p:nvPicPr>
-          <p:cNvPr id="19" name="Image 4" descr="preencoded.png">    </p:cNvPr>
-          <p:cNvPicPr>
-            <a:picLocks noChangeAspect="1"/>
-          </p:cNvPicPr>
-          <p:nvPr/>
-        </p:nvPicPr>
-        <p:blipFill>
-          <a:blip r:embed="rId5"/>
-          <a:stretch>
-            <a:fillRect/>
-          </a:stretch>
-        </p:blipFill>
-        <p:spPr>
-          <a:xfrm>
-            <a:off x="4448794" y="5870448"/>
-            <a:ext cx="603504" cy="603504"/>
-          </a:xfrm>
-          <a:prstGeom prst="rect">
-            <a:avLst/>
-          </a:prstGeom>
-        </p:spPr>
-      </p:pic>
-      <p:sp>
-        <p:nvSpPr>
-          <p:cNvPr id="20" name="Text 13"/>
-          <p:cNvSpPr txBox="1"/>
-          <p:nvPr/>
-        </p:nvSpPr>
-        <p:spPr>
-          <a:xfrm>
-            <a:off x="5996330" y="91440"/>
-            <a:ext cx="1748988" cy="384048"/>
-          </a:xfrm>
-          <a:prstGeom prst="rect">
-            <a:avLst/>
-          </a:prstGeom>
-          <a:noFill/>
-          <a:ln/>
-        </p:spPr>
-        <p:txBody>
-          <a:bodyPr wrap="square" lIns="0" tIns="0" rIns="0" bIns="0" rtlCol="0" anchor="ctr"/>
-          <a:lstStyle/>
-          <a:p>
-            <a:pPr indent="0" marL="0">
-              <a:lnSpc>
-                <a:spcPct val="115000"/>
-              </a:lnSpc>
-              <a:buNone/>
-            </a:pPr>
-            <a:r>
-              <a:rPr lang="en-US" sz="800" dirty="0">
-                <a:solidFill>
-                  <a:srgbClr val="1B2740"/>
-                </a:solidFill>
-                <a:latin typeface="Malgun Gothic" pitchFamily="34" charset="0"/>
-                <a:ea typeface="Malgun Gothic" pitchFamily="34" charset="-122"/>
-                <a:cs typeface="Malgun Gothic" pitchFamily="34" charset="-120"/>
-              </a:rPr>
-              <a:t>Alert</a:t>
-            </a:r>
-            <a:endParaRPr lang="en-US" sz="800" dirty="0"/>
-          </a:p>
-        </p:txBody>
-      </p:sp>
-      <p:pic>
-        <p:nvPicPr>
-          <p:cNvPr id="21" name="Image 5" descr="preencoded.png">    </p:cNvPr>
-          <p:cNvPicPr>
-            <a:picLocks noChangeAspect="1"/>
-          </p:cNvPicPr>
-          <p:nvPr/>
-        </p:nvPicPr>
-        <p:blipFill>
-          <a:blip r:embed="rId6"/>
-          <a:stretch>
-            <a:fillRect/>
-          </a:stretch>
-        </p:blipFill>
-        <p:spPr>
-          <a:xfrm>
-            <a:off x="7628772" y="384048"/>
-            <a:ext cx="603504" cy="603504"/>
-          </a:xfrm>
-          <a:prstGeom prst="rect">
-            <a:avLst/>
-          </a:prstGeom>
-        </p:spPr>
-      </p:pic>
-      <p:sp>
-        <p:nvSpPr>
-          <p:cNvPr id="22" name="Text 14"/>
-          <p:cNvSpPr txBox="1"/>
-          <p:nvPr/>
-        </p:nvSpPr>
-        <p:spPr>
-          <a:xfrm>
-            <a:off x="5996330" y="1463040"/>
-            <a:ext cx="1748988" cy="384048"/>
-          </a:xfrm>
-          <a:prstGeom prst="rect">
-            <a:avLst/>
-          </a:prstGeom>
-          <a:noFill/>
-          <a:ln/>
-        </p:spPr>
-        <p:txBody>
-          <a:bodyPr wrap="square" lIns="0" tIns="0" rIns="0" bIns="0" rtlCol="0" anchor="ctr"/>
-          <a:lstStyle/>
-          <a:p>
-            <a:pPr indent="0" marL="0">
-              <a:lnSpc>
-                <a:spcPct val="115000"/>
-              </a:lnSpc>
-              <a:buNone/>
-            </a:pPr>
-            <a:r>
-              <a:rPr lang="en-US" sz="800" dirty="0">
-                <a:solidFill>
-                  <a:srgbClr val="1B2740"/>
-                </a:solidFill>
-                <a:latin typeface="Malgun Gothic" pitchFamily="34" charset="0"/>
-                <a:ea typeface="Malgun Gothic" pitchFamily="34" charset="-122"/>
-                <a:cs typeface="Malgun Gothic" pitchFamily="34" charset="-120"/>
-              </a:rPr>
-              <a:t>Money</a:t>
-            </a:r>
-            <a:endParaRPr lang="en-US" sz="800" dirty="0"/>
-          </a:p>
-        </p:txBody>
-      </p:sp>
-      <p:pic>
-        <p:nvPicPr>
-          <p:cNvPr id="23" name="Image 6" descr="preencoded.png">    </p:cNvPr>
-          <p:cNvPicPr>
-            <a:picLocks noChangeAspect="1"/>
-          </p:cNvPicPr>
-          <p:nvPr/>
-        </p:nvPicPr>
-        <p:blipFill>
-          <a:blip r:embed="rId7"/>
-          <a:stretch>
-            <a:fillRect/>
-          </a:stretch>
-        </p:blipFill>
-        <p:spPr>
-          <a:xfrm>
-            <a:off x="7628772" y="1755648"/>
-            <a:ext cx="603504" cy="603504"/>
-          </a:xfrm>
-          <a:prstGeom prst="rect">
-            <a:avLst/>
-          </a:prstGeom>
-        </p:spPr>
-      </p:pic>
-      <p:sp>
-        <p:nvSpPr>
-          <p:cNvPr id="24" name="Text 15"/>
-          <p:cNvSpPr txBox="1"/>
-          <p:nvPr/>
-        </p:nvSpPr>
-        <p:spPr>
-          <a:xfrm>
-            <a:off x="5996330" y="2834640"/>
-            <a:ext cx="1748988" cy="384048"/>
-          </a:xfrm>
-          <a:prstGeom prst="rect">
-            <a:avLst/>
-          </a:prstGeom>
-          <a:noFill/>
-          <a:ln/>
-        </p:spPr>
-        <p:txBody>
-          <a:bodyPr wrap="square" lIns="0" tIns="0" rIns="0" bIns="0" rtlCol="0" anchor="ctr"/>
-          <a:lstStyle/>
-          <a:p>
-            <a:pPr indent="0" marL="0">
-              <a:lnSpc>
-                <a:spcPct val="115000"/>
-              </a:lnSpc>
-              <a:buNone/>
-            </a:pPr>
-            <a:r>
-              <a:rPr lang="en-US" sz="800" dirty="0">
-                <a:solidFill>
-                  <a:srgbClr val="1B2740"/>
-                </a:solidFill>
-                <a:latin typeface="Malgun Gothic" pitchFamily="34" charset="0"/>
-                <a:ea typeface="Malgun Gothic" pitchFamily="34" charset="-122"/>
-                <a:cs typeface="Malgun Gothic" pitchFamily="34" charset="-120"/>
-              </a:rPr>
-              <a:t>Cloud</a:t>
-            </a:r>
-            <a:endParaRPr lang="en-US" sz="800" dirty="0"/>
-          </a:p>
-        </p:txBody>
-      </p:sp>
-      <p:pic>
-        <p:nvPicPr>
-          <p:cNvPr id="25" name="Image 7" descr="preencoded.png">    </p:cNvPr>
-          <p:cNvPicPr>
-            <a:picLocks noChangeAspect="1"/>
-          </p:cNvPicPr>
-          <p:nvPr/>
-        </p:nvPicPr>
-        <p:blipFill>
-          <a:blip r:embed="rId8"/>
-          <a:stretch>
-            <a:fillRect/>
-          </a:stretch>
-        </p:blipFill>
-        <p:spPr>
-          <a:xfrm>
-            <a:off x="7628772" y="3127248"/>
-            <a:ext cx="603504" cy="603504"/>
-          </a:xfrm>
-          <a:prstGeom prst="rect">
-            <a:avLst/>
-          </a:prstGeom>
-        </p:spPr>
-      </p:pic>
-      <p:sp>
-        <p:nvSpPr>
-          <p:cNvPr id="26" name="Text 16"/>
-          <p:cNvSpPr txBox="1"/>
-          <p:nvPr/>
-        </p:nvSpPr>
-        <p:spPr>
-          <a:xfrm>
-            <a:off x="5996330" y="4206240"/>
-            <a:ext cx="1748988" cy="384048"/>
-          </a:xfrm>
-          <a:prstGeom prst="rect">
-            <a:avLst/>
-          </a:prstGeom>
-          <a:noFill/>
-          <a:ln/>
-        </p:spPr>
-        <p:txBody>
-          <a:bodyPr wrap="square" lIns="0" tIns="0" rIns="0" bIns="0" rtlCol="0" anchor="ctr"/>
-          <a:lstStyle/>
-          <a:p>
-            <a:pPr indent="0" marL="0">
-              <a:lnSpc>
-                <a:spcPct val="115000"/>
-              </a:lnSpc>
-              <a:buNone/>
-            </a:pPr>
-            <a:r>
-              <a:rPr lang="en-US" sz="800" dirty="0">
-                <a:solidFill>
-                  <a:srgbClr val="1B2740"/>
-                </a:solidFill>
-                <a:latin typeface="Malgun Gothic" pitchFamily="34" charset="0"/>
-                <a:ea typeface="Malgun Gothic" pitchFamily="34" charset="-122"/>
-                <a:cs typeface="Malgun Gothic" pitchFamily="34" charset="-120"/>
-              </a:rPr>
-              <a:t>Trash</a:t>
-            </a:r>
-            <a:endParaRPr lang="en-US" sz="800" dirty="0"/>
-          </a:p>
-        </p:txBody>
-      </p:sp>
-      <p:pic>
-        <p:nvPicPr>
-          <p:cNvPr id="27" name="Image 8" descr="preencoded.png">    </p:cNvPr>
-          <p:cNvPicPr>
-            <a:picLocks noChangeAspect="1"/>
-          </p:cNvPicPr>
-          <p:nvPr/>
-        </p:nvPicPr>
-        <p:blipFill>
-          <a:blip r:embed="rId9"/>
-          <a:stretch>
-            <a:fillRect/>
-          </a:stretch>
-        </p:blipFill>
-        <p:spPr>
-          <a:xfrm>
-            <a:off x="7628772" y="4498848"/>
-            <a:ext cx="603504" cy="603504"/>
-          </a:xfrm>
-          <a:prstGeom prst="rect">
-            <a:avLst/>
-          </a:prstGeom>
-        </p:spPr>
-      </p:pic>
-      <p:sp>
-        <p:nvSpPr>
-          <p:cNvPr id="28" name="Text 17"/>
-          <p:cNvSpPr txBox="1"/>
-          <p:nvPr/>
-        </p:nvSpPr>
-        <p:spPr>
-          <a:xfrm>
-            <a:off x="5996330" y="5577840"/>
-            <a:ext cx="1748988" cy="384048"/>
-          </a:xfrm>
-          <a:prstGeom prst="rect">
-            <a:avLst/>
-          </a:prstGeom>
-          <a:noFill/>
-          <a:ln/>
-        </p:spPr>
-        <p:txBody>
-          <a:bodyPr wrap="square" lIns="0" tIns="0" rIns="0" bIns="0" rtlCol="0" anchor="ctr"/>
-          <a:lstStyle/>
-          <a:p>
-            <a:pPr indent="0" marL="0">
-              <a:lnSpc>
-                <a:spcPct val="115000"/>
-              </a:lnSpc>
-              <a:buNone/>
-            </a:pPr>
-            <a:r>
-              <a:rPr lang="en-US" sz="800" dirty="0">
-                <a:solidFill>
-                  <a:srgbClr val="1B2740"/>
-                </a:solidFill>
-                <a:latin typeface="Malgun Gothic" pitchFamily="34" charset="0"/>
-                <a:ea typeface="Malgun Gothic" pitchFamily="34" charset="-122"/>
-                <a:cs typeface="Malgun Gothic" pitchFamily="34" charset="-120"/>
-              </a:rPr>
-              <a:t>Mute</a:t>
-            </a:r>
-            <a:endParaRPr lang="en-US" sz="800" dirty="0"/>
-          </a:p>
-        </p:txBody>
-      </p:sp>
-      <p:pic>
-        <p:nvPicPr>
-          <p:cNvPr id="29" name="Image 9" descr="preencoded.png">    </p:cNvPr>
-          <p:cNvPicPr>
-            <a:picLocks noChangeAspect="1"/>
-          </p:cNvPicPr>
-          <p:nvPr/>
-        </p:nvPicPr>
-        <p:blipFill>
-          <a:blip r:embed="rId10"/>
-          <a:stretch>
-            <a:fillRect/>
-          </a:stretch>
-        </p:blipFill>
-        <p:spPr>
-          <a:xfrm>
-            <a:off x="7628772" y="5870448"/>
-            <a:ext cx="603504" cy="603504"/>
-          </a:xfrm>
-          <a:prstGeom prst="rect">
-            <a:avLst/>
-          </a:prstGeom>
-        </p:spPr>
-      </p:pic>
-      <p:sp>
-        <p:nvSpPr>
-          <p:cNvPr id="30" name="Text 18"/>
-          <p:cNvSpPr txBox="1"/>
-          <p:nvPr/>
-        </p:nvSpPr>
-        <p:spPr>
-          <a:xfrm>
-            <a:off x="9176309" y="91440"/>
-            <a:ext cx="1748988" cy="384048"/>
-          </a:xfrm>
-          <a:prstGeom prst="rect">
-            <a:avLst/>
-          </a:prstGeom>
-          <a:noFill/>
-          <a:ln/>
-        </p:spPr>
-        <p:txBody>
-          <a:bodyPr wrap="square" lIns="0" tIns="0" rIns="0" bIns="0" rtlCol="0" anchor="ctr"/>
-          <a:lstStyle/>
-          <a:p>
-            <a:pPr indent="0" marL="0">
-              <a:lnSpc>
-                <a:spcPct val="115000"/>
-              </a:lnSpc>
-              <a:buNone/>
-            </a:pPr>
-            <a:r>
-              <a:rPr lang="en-US" sz="800" dirty="0">
-                <a:solidFill>
-                  <a:srgbClr val="1B2740"/>
-                </a:solidFill>
-                <a:latin typeface="Malgun Gothic" pitchFamily="34" charset="0"/>
-                <a:ea typeface="Malgun Gothic" pitchFamily="34" charset="-122"/>
-                <a:cs typeface="Malgun Gothic" pitchFamily="34" charset="-120"/>
-              </a:rPr>
-              <a:t>Sound</a:t>
-            </a:r>
-            <a:endParaRPr lang="en-US" sz="800" dirty="0"/>
-          </a:p>
-        </p:txBody>
-      </p:sp>
-      <p:pic>
-        <p:nvPicPr>
-          <p:cNvPr id="31" name="Image 10" descr="preencoded.png">    </p:cNvPr>
-          <p:cNvPicPr>
-            <a:picLocks noChangeAspect="1"/>
-          </p:cNvPicPr>
-          <p:nvPr/>
-        </p:nvPicPr>
-        <p:blipFill>
-          <a:blip r:embed="rId11"/>
-          <a:stretch>
-            <a:fillRect/>
-          </a:stretch>
-        </p:blipFill>
-        <p:spPr>
-          <a:xfrm>
-            <a:off x="10808751" y="384048"/>
-            <a:ext cx="603504" cy="603504"/>
-          </a:xfrm>
-          <a:prstGeom prst="rect">
-            <a:avLst/>
-          </a:prstGeom>
-        </p:spPr>
-      </p:pic>
-      <p:sp>
-        <p:nvSpPr>
-          <p:cNvPr id="32" name="Text 19"/>
-          <p:cNvSpPr txBox="1"/>
-          <p:nvPr/>
-        </p:nvSpPr>
-        <p:spPr>
-          <a:xfrm>
-            <a:off x="9176309" y="1463040"/>
-            <a:ext cx="1748988" cy="384048"/>
-          </a:xfrm>
-          <a:prstGeom prst="rect">
-            <a:avLst/>
-          </a:prstGeom>
-          <a:noFill/>
-          <a:ln/>
-        </p:spPr>
-        <p:txBody>
-          <a:bodyPr wrap="square" lIns="0" tIns="0" rIns="0" bIns="0" rtlCol="0" anchor="ctr"/>
-          <a:lstStyle/>
-          <a:p>
-            <a:pPr indent="0" marL="0">
-              <a:lnSpc>
-                <a:spcPct val="115000"/>
-              </a:lnSpc>
-              <a:buNone/>
-            </a:pPr>
-            <a:r>
-              <a:rPr lang="en-US" sz="800" dirty="0">
-                <a:solidFill>
-                  <a:srgbClr val="1B2740"/>
-                </a:solidFill>
-                <a:latin typeface="Malgun Gothic" pitchFamily="34" charset="0"/>
-                <a:ea typeface="Malgun Gothic" pitchFamily="34" charset="-122"/>
-                <a:cs typeface="Malgun Gothic" pitchFamily="34" charset="-120"/>
-              </a:rPr>
-              <a:t>Location</a:t>
-            </a:r>
-            <a:endParaRPr lang="en-US" sz="800" dirty="0"/>
-          </a:p>
-        </p:txBody>
-      </p:sp>
-      <p:pic>
-        <p:nvPicPr>
-          <p:cNvPr id="33" name="Image 11" descr="preencoded.png">    </p:cNvPr>
-          <p:cNvPicPr>
-            <a:picLocks noChangeAspect="1"/>
-          </p:cNvPicPr>
-          <p:nvPr/>
-        </p:nvPicPr>
-        <p:blipFill>
-          <a:blip r:embed="rId12"/>
-          <a:stretch>
-            <a:fillRect/>
-          </a:stretch>
-        </p:blipFill>
-        <p:spPr>
-          <a:xfrm>
-            <a:off x="10808751" y="1755648"/>
-            <a:ext cx="603504" cy="603504"/>
-          </a:xfrm>
-          <a:prstGeom prst="rect">
-            <a:avLst/>
-          </a:prstGeom>
-        </p:spPr>
-      </p:pic>
-      <p:sp>
-        <p:nvSpPr>
-          <p:cNvPr id="34" name="Text 20"/>
-          <p:cNvSpPr txBox="1"/>
-          <p:nvPr/>
-        </p:nvSpPr>
-        <p:spPr>
-          <a:xfrm>
-            <a:off x="9176309" y="2834640"/>
-            <a:ext cx="1748988" cy="384048"/>
-          </a:xfrm>
-          <a:prstGeom prst="rect">
-            <a:avLst/>
-          </a:prstGeom>
-          <a:noFill/>
-          <a:ln/>
-        </p:spPr>
-        <p:txBody>
-          <a:bodyPr wrap="square" lIns="0" tIns="0" rIns="0" bIns="0" rtlCol="0" anchor="ctr"/>
-          <a:lstStyle/>
-          <a:p>
-            <a:pPr indent="0" marL="0">
-              <a:lnSpc>
-                <a:spcPct val="115000"/>
-              </a:lnSpc>
-              <a:buNone/>
-            </a:pPr>
-            <a:r>
-              <a:rPr lang="en-US" sz="800" dirty="0">
-                <a:solidFill>
-                  <a:srgbClr val="1B2740"/>
-                </a:solidFill>
-                <a:latin typeface="Malgun Gothic" pitchFamily="34" charset="0"/>
-                <a:ea typeface="Malgun Gothic" pitchFamily="34" charset="-122"/>
-                <a:cs typeface="Malgun Gothic" pitchFamily="34" charset="-120"/>
-              </a:rPr>
-              <a:t>Certificate</a:t>
-            </a:r>
-            <a:endParaRPr lang="en-US" sz="800" dirty="0"/>
-          </a:p>
-        </p:txBody>
-      </p:sp>
-      <p:pic>
-        <p:nvPicPr>
-          <p:cNvPr id="35" name="Image 12" descr="preencoded.png">    </p:cNvPr>
-          <p:cNvPicPr>
-            <a:picLocks noChangeAspect="1"/>
-          </p:cNvPicPr>
-          <p:nvPr/>
-        </p:nvPicPr>
-        <p:blipFill>
-          <a:blip r:embed="rId13"/>
-          <a:stretch>
-            <a:fillRect/>
-          </a:stretch>
-        </p:blipFill>
-        <p:spPr>
-          <a:xfrm>
-            <a:off x="10808751" y="3127248"/>
-            <a:ext cx="603504" cy="603504"/>
-          </a:xfrm>
-          <a:prstGeom prst="rect">
-            <a:avLst/>
-          </a:prstGeom>
-        </p:spPr>
-      </p:pic>
-      <p:sp>
-        <p:nvSpPr>
-          <p:cNvPr id="36" name="Text 21"/>
-          <p:cNvSpPr txBox="1"/>
-          <p:nvPr/>
-        </p:nvSpPr>
-        <p:spPr>
-          <a:xfrm>
-            <a:off x="9176309" y="4206240"/>
-            <a:ext cx="1748988" cy="384048"/>
-          </a:xfrm>
-          <a:prstGeom prst="rect">
-            <a:avLst/>
-          </a:prstGeom>
-          <a:noFill/>
-          <a:ln/>
-        </p:spPr>
-        <p:txBody>
-          <a:bodyPr wrap="square" lIns="0" tIns="0" rIns="0" bIns="0" rtlCol="0" anchor="ctr"/>
-          <a:lstStyle/>
-          <a:p>
-            <a:pPr indent="0" marL="0">
-              <a:lnSpc>
-                <a:spcPct val="115000"/>
-              </a:lnSpc>
-              <a:buNone/>
-            </a:pPr>
-            <a:r>
-              <a:rPr lang="en-US" sz="800" dirty="0">
-                <a:solidFill>
-                  <a:srgbClr val="1B2740"/>
-                </a:solidFill>
-                <a:latin typeface="Malgun Gothic" pitchFamily="34" charset="0"/>
-                <a:ea typeface="Malgun Gothic" pitchFamily="34" charset="-122"/>
-                <a:cs typeface="Malgun Gothic" pitchFamily="34" charset="-120"/>
-              </a:rPr>
-              <a:t>Target</a:t>
-            </a:r>
-            <a:endParaRPr lang="en-US" sz="800" dirty="0"/>
-          </a:p>
-        </p:txBody>
-      </p:sp>
-      <p:pic>
-        <p:nvPicPr>
-          <p:cNvPr id="37" name="Image 13" descr="preencoded.png">    </p:cNvPr>
-          <p:cNvPicPr>
-            <a:picLocks noChangeAspect="1"/>
-          </p:cNvPicPr>
-          <p:nvPr/>
-        </p:nvPicPr>
-        <p:blipFill>
-          <a:blip r:embed="rId14"/>
-          <a:stretch>
-            <a:fillRect/>
-          </a:stretch>
-        </p:blipFill>
-        <p:spPr>
-          <a:xfrm>
-            <a:off x="10808751" y="4498848"/>
-            <a:ext cx="603504" cy="603504"/>
-          </a:xfrm>
-          <a:prstGeom prst="rect">
-            <a:avLst/>
-          </a:prstGeom>
-        </p:spPr>
-      </p:pic>
-      <p:sp>
-        <p:nvSpPr>
-          <p:cNvPr id="38" name="Text 22"/>
-          <p:cNvSpPr txBox="1"/>
-          <p:nvPr/>
-        </p:nvSpPr>
-        <p:spPr>
-          <a:xfrm>
-            <a:off x="9176309" y="5577840"/>
-            <a:ext cx="1748988" cy="384048"/>
-          </a:xfrm>
-          <a:prstGeom prst="rect">
-            <a:avLst/>
-          </a:prstGeom>
-          <a:noFill/>
-          <a:ln/>
-        </p:spPr>
-        <p:txBody>
-          <a:bodyPr wrap="square" lIns="0" tIns="0" rIns="0" bIns="0" rtlCol="0" anchor="ctr"/>
-          <a:lstStyle/>
-          <a:p>
-            <a:pPr indent="0" marL="0">
-              <a:lnSpc>
-                <a:spcPct val="115000"/>
-              </a:lnSpc>
-              <a:buNone/>
-            </a:pPr>
-            <a:r>
-              <a:rPr lang="en-US" sz="800" dirty="0">
-                <a:solidFill>
-                  <a:srgbClr val="1B2740"/>
-                </a:solidFill>
-                <a:latin typeface="Malgun Gothic" pitchFamily="34" charset="0"/>
-                <a:ea typeface="Malgun Gothic" pitchFamily="34" charset="-122"/>
-                <a:cs typeface="Malgun Gothic" pitchFamily="34" charset="-120"/>
-              </a:rPr>
-              <a:t>Projector</a:t>
-            </a:r>
-            <a:endParaRPr lang="en-US" sz="800" dirty="0"/>
-          </a:p>
-        </p:txBody>
-      </p:sp>
-      <p:pic>
-        <p:nvPicPr>
-          <p:cNvPr id="39" name="Image 14" descr="preencoded.png">    </p:cNvPr>
-          <p:cNvPicPr>
-            <a:picLocks noChangeAspect="1"/>
-          </p:cNvPicPr>
-          <p:nvPr/>
-        </p:nvPicPr>
-        <p:blipFill>
-          <a:blip r:embed="rId15"/>
-          <a:stretch>
-            <a:fillRect/>
-          </a:stretch>
-        </p:blipFill>
-        <p:spPr>
-          <a:xfrm>
-            <a:off x="10808751" y="5870448"/>
-            <a:ext cx="603504" cy="603504"/>
-          </a:xfrm>
-          <a:prstGeom prst="rect">
-            <a:avLst/>
-          </a:prstGeom>
-        </p:spPr>
-      </p:pic>
-    </p:spTree>
-  </p:cSld>
-  <p:clrMapOvr>
-    <a:masterClrMapping/>
-  </p:clrMapOvr>
-</p:sld>
-</file>
-
 <file path=ppt/slides/slide12.xml><?xml version="1.0" encoding="utf-8"?>
 <p:sld xmlns:a="http://schemas.openxmlformats.org/drawingml/2006/main" xmlns:r="http://schemas.openxmlformats.org/officeDocument/2006/relationships" xmlns:p="http://schemas.openxmlformats.org/presentationml/2006/main">
   <p:cSld name="Slide 12">
@@ -6697,7 +2637,7 @@
             <a:pPr algn="ctr" indent="0" marL="0">
               <a:buNone/>
             </a:pPr>
-            <a:r>
+            <a:fld id="{1451A45C-D62D-4571-BEDF-7C1C8506378D}" type="slidenum">
               <a:rPr lang="en-US" sz="850" dirty="0">
                 <a:solidFill>
                   <a:srgbClr val="8794AC"/>
@@ -6706,8 +2646,8 @@
                 <a:ea typeface="Malgun Gothic" pitchFamily="34" charset="-122"/>
                 <a:cs typeface="Malgun Gothic" pitchFamily="34" charset="-120"/>
               </a:rPr>
-              <a:t>12</a:t>
-            </a:r>
+              <a:t>9</a:t>
+            </a:fld>
             <a:endParaRPr lang="en-US" sz="850" dirty="0"/>
           </a:p>
         </p:txBody>
@@ -6915,7 +2855,7 @@
             <a:pPr algn="ctr" indent="0" marL="0">
               <a:buNone/>
             </a:pPr>
-            <a:r>
+            <a:fld id="{6B636734-354F-4A87-AE1D-6EA630A83689}" type="slidenum">
               <a:rPr lang="en-US" sz="850" dirty="0">
                 <a:solidFill>
                   <a:srgbClr val="8794AC"/>
@@ -6924,8 +2864,8 @@
                 <a:ea typeface="Malgun Gothic" pitchFamily="34" charset="-122"/>
                 <a:cs typeface="Malgun Gothic" pitchFamily="34" charset="-120"/>
               </a:rPr>
-              <a:t>13</a:t>
-            </a:r>
+              <a:t>10</a:t>
+            </a:fld>
             <a:endParaRPr lang="en-US" sz="850" dirty="0"/>
           </a:p>
         </p:txBody>
@@ -7073,7 +3013,7 @@
             <a:pPr algn="ctr" indent="0" marL="0">
               <a:buNone/>
             </a:pPr>
-            <a:r>
+            <a:fld id="{27B916B9-80A6-4786-9C31-F4FC162C8B55}" type="slidenum">
               <a:rPr lang="en-US" sz="850" dirty="0">
                 <a:solidFill>
                   <a:srgbClr val="8794AC"/>
@@ -7082,8 +3022,8 @@
                 <a:ea typeface="Malgun Gothic" pitchFamily="34" charset="-122"/>
                 <a:cs typeface="Malgun Gothic" pitchFamily="34" charset="-120"/>
               </a:rPr>
-              <a:t>14</a:t>
-            </a:r>
+              <a:t>11</a:t>
+            </a:fld>
             <a:endParaRPr lang="en-US" sz="850" dirty="0"/>
           </a:p>
         </p:txBody>
@@ -7358,7 +3298,7 @@
             <a:pPr algn="ctr" indent="0" marL="0">
               <a:buNone/>
             </a:pPr>
-            <a:r>
+            <a:fld id="{7ACAD7AB-CF82-43B9-8B8B-3C5E4834177A}" type="slidenum">
               <a:rPr lang="en-US" sz="850" dirty="0">
                 <a:solidFill>
                   <a:srgbClr val="8794AC"/>
@@ -7367,8 +3307,8 @@
                 <a:ea typeface="Malgun Gothic" pitchFamily="34" charset="-122"/>
                 <a:cs typeface="Malgun Gothic" pitchFamily="34" charset="-120"/>
               </a:rPr>
-              <a:t>15</a:t>
-            </a:r>
+              <a:t>12</a:t>
+            </a:fld>
             <a:endParaRPr lang="en-US" sz="850" dirty="0"/>
           </a:p>
         </p:txBody>
@@ -7922,7 +3862,7 @@
             <a:pPr algn="ctr" indent="0" marL="0">
               <a:buNone/>
             </a:pPr>
-            <a:r>
+            <a:fld id="{B6C68756-A65F-4413-A868-F37C4150BBCD}" type="slidenum">
               <a:rPr lang="en-US" sz="850" dirty="0">
                 <a:solidFill>
                   <a:srgbClr val="8794AC"/>
@@ -7931,8 +3871,8 @@
                 <a:ea typeface="Malgun Gothic" pitchFamily="34" charset="-122"/>
                 <a:cs typeface="Malgun Gothic" pitchFamily="34" charset="-120"/>
               </a:rPr>
-              <a:t>16</a:t>
-            </a:r>
+              <a:t>13</a:t>
+            </a:fld>
             <a:endParaRPr lang="en-US" sz="850" dirty="0"/>
           </a:p>
         </p:txBody>
@@ -8536,1228 +4476,6 @@
           </a:p>
         </p:txBody>
       </p:sp>
-    </p:spTree>
-  </p:cSld>
-  <p:clrMapOvr>
-    <a:masterClrMapping/>
-  </p:clrMapOvr>
-</p:sld>
-</file>
-
-<file path=ppt/slides/slide17.xml><?xml version="1.0" encoding="utf-8"?>
-<p:sld xmlns:a="http://schemas.openxmlformats.org/drawingml/2006/main" xmlns:r="http://schemas.openxmlformats.org/officeDocument/2006/relationships" xmlns:p="http://schemas.openxmlformats.org/presentationml/2006/main">
-  <p:cSld name="Slide 17">
-    <p:bg>
-      <p:bgPr>
-        <a:solidFill>
-          <a:srgbClr val="FFFFFF"/>
-        </a:solidFill>
-      </p:bgPr>
-    </p:bg>
-    <p:spTree>
-      <p:nvGrpSpPr>
-        <p:cNvPr id="1" name=""/>
-        <p:cNvGrpSpPr/>
-        <p:nvPr/>
-      </p:nvGrpSpPr>
-      <p:grpSpPr>
-        <a:xfrm>
-          <a:off x="0" y="0"/>
-          <a:ext cx="0" cy="0"/>
-          <a:chOff x="0" y="0"/>
-          <a:chExt cx="0" cy="0"/>
-        </a:xfrm>
-      </p:grpSpPr>
-      <p:sp>
-        <p:nvSpPr>
-          <p:cNvPr id="2" name="Shape 0"/>
-          <p:cNvSpPr/>
-          <p:nvPr/>
-        </p:nvSpPr>
-        <p:spPr>
-          <a:xfrm>
-            <a:off x="0" y="0"/>
-            <a:ext cx="2651760" cy="3429000"/>
-          </a:xfrm>
-          <a:prstGeom prst="rect">
-            <a:avLst/>
-          </a:prstGeom>
-          <a:solidFill>
-            <a:srgbClr val="1E2C4F"/>
-          </a:solidFill>
-          <a:ln w="12700">
-            <a:solidFill>
-              <a:srgbClr val="1E2C4F"/>
-            </a:solidFill>
-            <a:prstDash val="solid"/>
-          </a:ln>
-        </p:spPr>
-      </p:sp>
-      <p:sp>
-        <p:nvSpPr>
-          <p:cNvPr id="3" name="Shape 1"/>
-          <p:cNvSpPr/>
-          <p:nvPr/>
-        </p:nvSpPr>
-        <p:spPr>
-          <a:xfrm>
-            <a:off x="5831738" y="0"/>
-            <a:ext cx="0" cy="6858000"/>
-          </a:xfrm>
-          <a:prstGeom prst="line">
-            <a:avLst/>
-          </a:prstGeom>
-          <a:noFill/>
-          <a:ln w="7620">
-            <a:solidFill>
-              <a:srgbClr val="D2D9E5"/>
-            </a:solidFill>
-            <a:prstDash val="solid"/>
-          </a:ln>
-        </p:spPr>
-      </p:sp>
-      <p:sp>
-        <p:nvSpPr>
-          <p:cNvPr id="4" name="Shape 2"/>
-          <p:cNvSpPr/>
-          <p:nvPr/>
-        </p:nvSpPr>
-        <p:spPr>
-          <a:xfrm>
-            <a:off x="9011717" y="0"/>
-            <a:ext cx="0" cy="6858000"/>
-          </a:xfrm>
-          <a:prstGeom prst="line">
-            <a:avLst/>
-          </a:prstGeom>
-          <a:noFill/>
-          <a:ln w="7620">
-            <a:solidFill>
-              <a:srgbClr val="D2D9E5"/>
-            </a:solidFill>
-            <a:prstDash val="solid"/>
-          </a:ln>
-        </p:spPr>
-      </p:sp>
-      <p:sp>
-        <p:nvSpPr>
-          <p:cNvPr id="5" name="Shape 3"/>
-          <p:cNvSpPr/>
-          <p:nvPr/>
-        </p:nvSpPr>
-        <p:spPr>
-          <a:xfrm>
-            <a:off x="2651760" y="3429000"/>
-            <a:ext cx="0" cy="3429000"/>
-          </a:xfrm>
-          <a:prstGeom prst="line">
-            <a:avLst/>
-          </a:prstGeom>
-          <a:noFill/>
-          <a:ln w="7620">
-            <a:solidFill>
-              <a:srgbClr val="D2D9E5"/>
-            </a:solidFill>
-            <a:prstDash val="solid"/>
-          </a:ln>
-        </p:spPr>
-      </p:sp>
-      <p:sp>
-        <p:nvSpPr>
-          <p:cNvPr id="6" name="Shape 4"/>
-          <p:cNvSpPr/>
-          <p:nvPr/>
-        </p:nvSpPr>
-        <p:spPr>
-          <a:xfrm>
-            <a:off x="2651760" y="1371600"/>
-            <a:ext cx="9539935" cy="0"/>
-          </a:xfrm>
-          <a:prstGeom prst="line">
-            <a:avLst/>
-          </a:prstGeom>
-          <a:noFill/>
-          <a:ln w="7620">
-            <a:solidFill>
-              <a:srgbClr val="D2D9E5"/>
-            </a:solidFill>
-            <a:prstDash val="sysDash"/>
-          </a:ln>
-        </p:spPr>
-      </p:sp>
-      <p:sp>
-        <p:nvSpPr>
-          <p:cNvPr id="7" name="Shape 5"/>
-          <p:cNvSpPr/>
-          <p:nvPr/>
-        </p:nvSpPr>
-        <p:spPr>
-          <a:xfrm>
-            <a:off x="2651760" y="2743200"/>
-            <a:ext cx="9539935" cy="0"/>
-          </a:xfrm>
-          <a:prstGeom prst="line">
-            <a:avLst/>
-          </a:prstGeom>
-          <a:noFill/>
-          <a:ln w="7620">
-            <a:solidFill>
-              <a:srgbClr val="D2D9E5"/>
-            </a:solidFill>
-            <a:prstDash val="sysDash"/>
-          </a:ln>
-        </p:spPr>
-      </p:sp>
-      <p:sp>
-        <p:nvSpPr>
-          <p:cNvPr id="8" name="Shape 6"/>
-          <p:cNvSpPr/>
-          <p:nvPr/>
-        </p:nvSpPr>
-        <p:spPr>
-          <a:xfrm>
-            <a:off x="2651760" y="4114800"/>
-            <a:ext cx="9539935" cy="0"/>
-          </a:xfrm>
-          <a:prstGeom prst="line">
-            <a:avLst/>
-          </a:prstGeom>
-          <a:noFill/>
-          <a:ln w="7620">
-            <a:solidFill>
-              <a:srgbClr val="D2D9E5"/>
-            </a:solidFill>
-            <a:prstDash val="sysDash"/>
-          </a:ln>
-        </p:spPr>
-      </p:sp>
-      <p:sp>
-        <p:nvSpPr>
-          <p:cNvPr id="9" name="Shape 7"/>
-          <p:cNvSpPr/>
-          <p:nvPr/>
-        </p:nvSpPr>
-        <p:spPr>
-          <a:xfrm>
-            <a:off x="2651760" y="5486400"/>
-            <a:ext cx="9539935" cy="0"/>
-          </a:xfrm>
-          <a:prstGeom prst="line">
-            <a:avLst/>
-          </a:prstGeom>
-          <a:noFill/>
-          <a:ln w="7620">
-            <a:solidFill>
-              <a:srgbClr val="D2D9E5"/>
-            </a:solidFill>
-            <a:prstDash val="sysDash"/>
-          </a:ln>
-        </p:spPr>
-      </p:sp>
-      <p:sp>
-        <p:nvSpPr>
-          <p:cNvPr id="10" name="Text 8"/>
-          <p:cNvSpPr txBox="1"/>
-          <p:nvPr/>
-        </p:nvSpPr>
-        <p:spPr>
-          <a:xfrm>
-            <a:off x="2816352" y="91440"/>
-            <a:ext cx="1748988" cy="384048"/>
-          </a:xfrm>
-          <a:prstGeom prst="rect">
-            <a:avLst/>
-          </a:prstGeom>
-          <a:noFill/>
-          <a:ln/>
-        </p:spPr>
-        <p:txBody>
-          <a:bodyPr wrap="square" lIns="0" tIns="0" rIns="0" bIns="0" rtlCol="0" anchor="ctr"/>
-          <a:lstStyle/>
-          <a:p>
-            <a:pPr indent="0" marL="0">
-              <a:lnSpc>
-                <a:spcPct val="115000"/>
-              </a:lnSpc>
-              <a:buNone/>
-            </a:pPr>
-            <a:r>
-              <a:rPr lang="en-US" sz="800" dirty="0">
-                <a:solidFill>
-                  <a:srgbClr val="1B2740"/>
-                </a:solidFill>
-                <a:latin typeface="Malgun Gothic" pitchFamily="34" charset="0"/>
-                <a:ea typeface="Malgun Gothic" pitchFamily="34" charset="-122"/>
-                <a:cs typeface="Malgun Gothic" pitchFamily="34" charset="-120"/>
-              </a:rPr>
-              <a:t>극지방공 레이더</a:t>
-            </a:r>
-            <a:endParaRPr lang="en-US" sz="800" dirty="0"/>
-          </a:p>
-          <a:p>
-            <a:pPr indent="0" marL="0">
-              <a:lnSpc>
-                <a:spcPct val="115000"/>
-              </a:lnSpc>
-              <a:buNone/>
-            </a:pPr>
-            <a:r>
-              <a:rPr lang="en-US" sz="800" dirty="0">
-                <a:solidFill>
-                  <a:srgbClr val="1B2740"/>
-                </a:solidFill>
-                <a:latin typeface="Malgun Gothic" pitchFamily="34" charset="0"/>
-                <a:ea typeface="Malgun Gothic" pitchFamily="34" charset="-122"/>
-                <a:cs typeface="Malgun Gothic" pitchFamily="34" charset="-120"/>
-              </a:rPr>
-              <a:t>차량</a:t>
-            </a:r>
-            <a:endParaRPr lang="en-US" sz="800" dirty="0"/>
-          </a:p>
-        </p:txBody>
-      </p:sp>
-      <p:pic>
-        <p:nvPicPr>
-          <p:cNvPr id="11" name="Image 0" descr="preencoded.png">    </p:cNvPr>
-          <p:cNvPicPr>
-            <a:picLocks noChangeAspect="1"/>
-          </p:cNvPicPr>
-          <p:nvPr/>
-        </p:nvPicPr>
-        <p:blipFill>
-          <a:blip r:embed="rId1"/>
-          <a:stretch>
-            <a:fillRect/>
-          </a:stretch>
-        </p:blipFill>
-        <p:spPr>
-          <a:xfrm>
-            <a:off x="4448794" y="384048"/>
-            <a:ext cx="603504" cy="603504"/>
-          </a:xfrm>
-          <a:prstGeom prst="rect">
-            <a:avLst/>
-          </a:prstGeom>
-        </p:spPr>
-      </p:pic>
-      <p:sp>
-        <p:nvSpPr>
-          <p:cNvPr id="12" name="Text 9"/>
-          <p:cNvSpPr txBox="1"/>
-          <p:nvPr/>
-        </p:nvSpPr>
-        <p:spPr>
-          <a:xfrm>
-            <a:off x="2816352" y="1463040"/>
-            <a:ext cx="1748988" cy="384048"/>
-          </a:xfrm>
-          <a:prstGeom prst="rect">
-            <a:avLst/>
-          </a:prstGeom>
-          <a:noFill/>
-          <a:ln/>
-        </p:spPr>
-        <p:txBody>
-          <a:bodyPr wrap="square" lIns="0" tIns="0" rIns="0" bIns="0" rtlCol="0" anchor="ctr"/>
-          <a:lstStyle/>
-          <a:p>
-            <a:pPr indent="0" marL="0">
-              <a:lnSpc>
-                <a:spcPct val="115000"/>
-              </a:lnSpc>
-              <a:buNone/>
-            </a:pPr>
-            <a:r>
-              <a:rPr lang="en-US" sz="800" dirty="0">
-                <a:solidFill>
-                  <a:srgbClr val="1B2740"/>
-                </a:solidFill>
-                <a:latin typeface="Malgun Gothic" pitchFamily="34" charset="0"/>
-                <a:ea typeface="Malgun Gothic" pitchFamily="34" charset="-122"/>
-                <a:cs typeface="Malgun Gothic" pitchFamily="34" charset="-120"/>
-              </a:rPr>
-              <a:t>고스트로보틱스</a:t>
-            </a:r>
-            <a:endParaRPr lang="en-US" sz="800" dirty="0"/>
-          </a:p>
-          <a:p>
-            <a:pPr indent="0" marL="0">
-              <a:lnSpc>
-                <a:spcPct val="115000"/>
-              </a:lnSpc>
-              <a:buNone/>
-            </a:pPr>
-            <a:r>
-              <a:rPr lang="en-US" sz="800" dirty="0">
-                <a:solidFill>
-                  <a:srgbClr val="1B2740"/>
-                </a:solidFill>
-                <a:latin typeface="Malgun Gothic" pitchFamily="34" charset="0"/>
-                <a:ea typeface="Malgun Gothic" pitchFamily="34" charset="-122"/>
-                <a:cs typeface="Malgun Gothic" pitchFamily="34" charset="-120"/>
-              </a:rPr>
-              <a:t>비전60</a:t>
-            </a:r>
-            <a:endParaRPr lang="en-US" sz="800" dirty="0"/>
-          </a:p>
-        </p:txBody>
-      </p:sp>
-      <p:pic>
-        <p:nvPicPr>
-          <p:cNvPr id="13" name="Image 1" descr="preencoded.png">    </p:cNvPr>
-          <p:cNvPicPr>
-            <a:picLocks noChangeAspect="1"/>
-          </p:cNvPicPr>
-          <p:nvPr/>
-        </p:nvPicPr>
-        <p:blipFill>
-          <a:blip r:embed="rId2"/>
-          <a:stretch>
-            <a:fillRect/>
-          </a:stretch>
-        </p:blipFill>
-        <p:spPr>
-          <a:xfrm>
-            <a:off x="4448794" y="1755648"/>
-            <a:ext cx="603504" cy="603504"/>
-          </a:xfrm>
-          <a:prstGeom prst="rect">
-            <a:avLst/>
-          </a:prstGeom>
-        </p:spPr>
-      </p:pic>
-      <p:sp>
-        <p:nvSpPr>
-          <p:cNvPr id="14" name="Text 10"/>
-          <p:cNvSpPr txBox="1"/>
-          <p:nvPr/>
-        </p:nvSpPr>
-        <p:spPr>
-          <a:xfrm>
-            <a:off x="2816352" y="2834640"/>
-            <a:ext cx="1748988" cy="384048"/>
-          </a:xfrm>
-          <a:prstGeom prst="rect">
-            <a:avLst/>
-          </a:prstGeom>
-          <a:noFill/>
-          <a:ln/>
-        </p:spPr>
-        <p:txBody>
-          <a:bodyPr wrap="square" lIns="0" tIns="0" rIns="0" bIns="0" rtlCol="0" anchor="ctr"/>
-          <a:lstStyle/>
-          <a:p>
-            <a:pPr indent="0" marL="0">
-              <a:lnSpc>
-                <a:spcPct val="115000"/>
-              </a:lnSpc>
-              <a:buNone/>
-            </a:pPr>
-            <a:r>
-              <a:rPr lang="en-US" sz="800" dirty="0">
-                <a:solidFill>
-                  <a:srgbClr val="1B2740"/>
-                </a:solidFill>
-                <a:latin typeface="Malgun Gothic" pitchFamily="34" charset="0"/>
-                <a:ea typeface="Malgun Gothic" pitchFamily="34" charset="-122"/>
-                <a:cs typeface="Malgun Gothic" pitchFamily="34" charset="-120"/>
-              </a:rPr>
-              <a:t>KPS위성</a:t>
-            </a:r>
-            <a:endParaRPr lang="en-US" sz="800" dirty="0"/>
-          </a:p>
-        </p:txBody>
-      </p:sp>
-      <p:pic>
-        <p:nvPicPr>
-          <p:cNvPr id="15" name="Image 2" descr="preencoded.png">    </p:cNvPr>
-          <p:cNvPicPr>
-            <a:picLocks noChangeAspect="1"/>
-          </p:cNvPicPr>
-          <p:nvPr/>
-        </p:nvPicPr>
-        <p:blipFill>
-          <a:blip r:embed="rId3"/>
-          <a:stretch>
-            <a:fillRect/>
-          </a:stretch>
-        </p:blipFill>
-        <p:spPr>
-          <a:xfrm>
-            <a:off x="4448794" y="3127248"/>
-            <a:ext cx="603504" cy="603504"/>
-          </a:xfrm>
-          <a:prstGeom prst="rect">
-            <a:avLst/>
-          </a:prstGeom>
-        </p:spPr>
-      </p:pic>
-      <p:sp>
-        <p:nvSpPr>
-          <p:cNvPr id="16" name="Text 11"/>
-          <p:cNvSpPr txBox="1"/>
-          <p:nvPr/>
-        </p:nvSpPr>
-        <p:spPr>
-          <a:xfrm>
-            <a:off x="2816352" y="4206240"/>
-            <a:ext cx="1748988" cy="384048"/>
-          </a:xfrm>
-          <a:prstGeom prst="rect">
-            <a:avLst/>
-          </a:prstGeom>
-          <a:noFill/>
-          <a:ln/>
-        </p:spPr>
-        <p:txBody>
-          <a:bodyPr wrap="square" lIns="0" tIns="0" rIns="0" bIns="0" rtlCol="0" anchor="ctr"/>
-          <a:lstStyle/>
-          <a:p>
-            <a:pPr indent="0" marL="0">
-              <a:lnSpc>
-                <a:spcPct val="115000"/>
-              </a:lnSpc>
-              <a:buNone/>
-            </a:pPr>
-            <a:r>
-              <a:rPr lang="en-US" sz="800" dirty="0">
-                <a:solidFill>
-                  <a:srgbClr val="1B2740"/>
-                </a:solidFill>
-                <a:latin typeface="Malgun Gothic" pitchFamily="34" charset="0"/>
-                <a:ea typeface="Malgun Gothic" pitchFamily="34" charset="-122"/>
-                <a:cs typeface="Malgun Gothic" pitchFamily="34" charset="-120"/>
-              </a:rPr>
-              <a:t>SAR위성</a:t>
-            </a:r>
-            <a:endParaRPr lang="en-US" sz="800" dirty="0"/>
-          </a:p>
-        </p:txBody>
-      </p:sp>
-      <p:pic>
-        <p:nvPicPr>
-          <p:cNvPr id="17" name="Image 3" descr="preencoded.png">    </p:cNvPr>
-          <p:cNvPicPr>
-            <a:picLocks noChangeAspect="1"/>
-          </p:cNvPicPr>
-          <p:nvPr/>
-        </p:nvPicPr>
-        <p:blipFill>
-          <a:blip r:embed="rId4"/>
-          <a:stretch>
-            <a:fillRect/>
-          </a:stretch>
-        </p:blipFill>
-        <p:spPr>
-          <a:xfrm>
-            <a:off x="4448794" y="4498848"/>
-            <a:ext cx="603504" cy="603504"/>
-          </a:xfrm>
-          <a:prstGeom prst="rect">
-            <a:avLst/>
-          </a:prstGeom>
-        </p:spPr>
-      </p:pic>
-      <p:sp>
-        <p:nvSpPr>
-          <p:cNvPr id="18" name="Text 12"/>
-          <p:cNvSpPr txBox="1"/>
-          <p:nvPr/>
-        </p:nvSpPr>
-        <p:spPr>
-          <a:xfrm>
-            <a:off x="2816352" y="5577840"/>
-            <a:ext cx="1748988" cy="384048"/>
-          </a:xfrm>
-          <a:prstGeom prst="rect">
-            <a:avLst/>
-          </a:prstGeom>
-          <a:noFill/>
-          <a:ln/>
-        </p:spPr>
-        <p:txBody>
-          <a:bodyPr wrap="square" lIns="0" tIns="0" rIns="0" bIns="0" rtlCol="0" anchor="ctr"/>
-          <a:lstStyle/>
-          <a:p>
-            <a:pPr indent="0" marL="0">
-              <a:lnSpc>
-                <a:spcPct val="115000"/>
-              </a:lnSpc>
-              <a:buNone/>
-            </a:pPr>
-            <a:r>
-              <a:rPr lang="en-US" sz="800" dirty="0">
-                <a:solidFill>
-                  <a:srgbClr val="1B2740"/>
-                </a:solidFill>
-                <a:latin typeface="Malgun Gothic" pitchFamily="34" charset="0"/>
-                <a:ea typeface="Malgun Gothic" pitchFamily="34" charset="-122"/>
-                <a:cs typeface="Malgun Gothic" pitchFamily="34" charset="-120"/>
-              </a:rPr>
-              <a:t>40kg 카고드론</a:t>
-            </a:r>
-            <a:endParaRPr lang="en-US" sz="800" dirty="0"/>
-          </a:p>
-        </p:txBody>
-      </p:sp>
-      <p:pic>
-        <p:nvPicPr>
-          <p:cNvPr id="19" name="Image 4" descr="preencoded.png">    </p:cNvPr>
-          <p:cNvPicPr>
-            <a:picLocks noChangeAspect="1"/>
-          </p:cNvPicPr>
-          <p:nvPr/>
-        </p:nvPicPr>
-        <p:blipFill>
-          <a:blip r:embed="rId5"/>
-          <a:stretch>
-            <a:fillRect/>
-          </a:stretch>
-        </p:blipFill>
-        <p:spPr>
-          <a:xfrm>
-            <a:off x="4448794" y="5870448"/>
-            <a:ext cx="603504" cy="603504"/>
-          </a:xfrm>
-          <a:prstGeom prst="rect">
-            <a:avLst/>
-          </a:prstGeom>
-        </p:spPr>
-      </p:pic>
-      <p:sp>
-        <p:nvSpPr>
-          <p:cNvPr id="20" name="Text 13"/>
-          <p:cNvSpPr txBox="1"/>
-          <p:nvPr/>
-        </p:nvSpPr>
-        <p:spPr>
-          <a:xfrm>
-            <a:off x="5996330" y="91440"/>
-            <a:ext cx="1748988" cy="384048"/>
-          </a:xfrm>
-          <a:prstGeom prst="rect">
-            <a:avLst/>
-          </a:prstGeom>
-          <a:noFill/>
-          <a:ln/>
-        </p:spPr>
-        <p:txBody>
-          <a:bodyPr wrap="square" lIns="0" tIns="0" rIns="0" bIns="0" rtlCol="0" anchor="ctr"/>
-          <a:lstStyle/>
-          <a:p>
-            <a:pPr indent="0" marL="0">
-              <a:lnSpc>
-                <a:spcPct val="115000"/>
-              </a:lnSpc>
-              <a:buNone/>
-            </a:pPr>
-            <a:r>
-              <a:rPr lang="en-US" sz="800" dirty="0">
-                <a:solidFill>
-                  <a:srgbClr val="1B2740"/>
-                </a:solidFill>
-                <a:latin typeface="Malgun Gothic" pitchFamily="34" charset="0"/>
-                <a:ea typeface="Malgun Gothic" pitchFamily="34" charset="-122"/>
-                <a:cs typeface="Malgun Gothic" pitchFamily="34" charset="-120"/>
-              </a:rPr>
-              <a:t>다목적무인헬기</a:t>
-            </a:r>
-            <a:endParaRPr lang="en-US" sz="800" dirty="0"/>
-          </a:p>
-        </p:txBody>
-      </p:sp>
-      <p:pic>
-        <p:nvPicPr>
-          <p:cNvPr id="21" name="Image 5" descr="preencoded.png">    </p:cNvPr>
-          <p:cNvPicPr>
-            <a:picLocks noChangeAspect="1"/>
-          </p:cNvPicPr>
-          <p:nvPr/>
-        </p:nvPicPr>
-        <p:blipFill>
-          <a:blip r:embed="rId6"/>
-          <a:stretch>
-            <a:fillRect/>
-          </a:stretch>
-        </p:blipFill>
-        <p:spPr>
-          <a:xfrm>
-            <a:off x="7628772" y="384048"/>
-            <a:ext cx="603504" cy="603504"/>
-          </a:xfrm>
-          <a:prstGeom prst="rect">
-            <a:avLst/>
-          </a:prstGeom>
-        </p:spPr>
-      </p:pic>
-      <p:sp>
-        <p:nvSpPr>
-          <p:cNvPr id="22" name="Text 14"/>
-          <p:cNvSpPr txBox="1"/>
-          <p:nvPr/>
-        </p:nvSpPr>
-        <p:spPr>
-          <a:xfrm>
-            <a:off x="5996330" y="1463040"/>
-            <a:ext cx="1748988" cy="384048"/>
-          </a:xfrm>
-          <a:prstGeom prst="rect">
-            <a:avLst/>
-          </a:prstGeom>
-          <a:noFill/>
-          <a:ln/>
-        </p:spPr>
-        <p:txBody>
-          <a:bodyPr wrap="square" lIns="0" tIns="0" rIns="0" bIns="0" rtlCol="0" anchor="ctr"/>
-          <a:lstStyle/>
-          <a:p>
-            <a:pPr indent="0" marL="0">
-              <a:lnSpc>
-                <a:spcPct val="115000"/>
-              </a:lnSpc>
-              <a:buNone/>
-            </a:pPr>
-            <a:r>
-              <a:rPr lang="en-US" sz="800" dirty="0">
-                <a:solidFill>
-                  <a:srgbClr val="1B2740"/>
-                </a:solidFill>
-                <a:latin typeface="Malgun Gothic" pitchFamily="34" charset="0"/>
-                <a:ea typeface="Malgun Gothic" pitchFamily="34" charset="-122"/>
-                <a:cs typeface="Malgun Gothic" pitchFamily="34" charset="-120"/>
-              </a:rPr>
-              <a:t>레이저소화기</a:t>
-            </a:r>
-            <a:endParaRPr lang="en-US" sz="800" dirty="0"/>
-          </a:p>
-          <a:p>
-            <a:pPr indent="0" marL="0">
-              <a:lnSpc>
-                <a:spcPct val="115000"/>
-              </a:lnSpc>
-              <a:buNone/>
-            </a:pPr>
-            <a:r>
-              <a:rPr lang="en-US" sz="800" dirty="0">
-                <a:solidFill>
-                  <a:srgbClr val="1B2740"/>
-                </a:solidFill>
-                <a:latin typeface="Malgun Gothic" pitchFamily="34" charset="0"/>
-                <a:ea typeface="Malgun Gothic" pitchFamily="34" charset="-122"/>
-                <a:cs typeface="Malgun Gothic" pitchFamily="34" charset="-120"/>
-              </a:rPr>
-              <a:t>착용 군인</a:t>
-            </a:r>
-            <a:endParaRPr lang="en-US" sz="800" dirty="0"/>
-          </a:p>
-        </p:txBody>
-      </p:sp>
-      <p:pic>
-        <p:nvPicPr>
-          <p:cNvPr id="23" name="Image 6" descr="preencoded.png">    </p:cNvPr>
-          <p:cNvPicPr>
-            <a:picLocks noChangeAspect="1"/>
-          </p:cNvPicPr>
-          <p:nvPr/>
-        </p:nvPicPr>
-        <p:blipFill>
-          <a:blip r:embed="rId7"/>
-          <a:stretch>
-            <a:fillRect/>
-          </a:stretch>
-        </p:blipFill>
-        <p:spPr>
-          <a:xfrm>
-            <a:off x="7628772" y="1755648"/>
-            <a:ext cx="603504" cy="603504"/>
-          </a:xfrm>
-          <a:prstGeom prst="rect">
-            <a:avLst/>
-          </a:prstGeom>
-        </p:spPr>
-      </p:pic>
-      <p:sp>
-        <p:nvSpPr>
-          <p:cNvPr id="24" name="Text 15"/>
-          <p:cNvSpPr txBox="1"/>
-          <p:nvPr/>
-        </p:nvSpPr>
-        <p:spPr>
-          <a:xfrm>
-            <a:off x="5996330" y="2834640"/>
-            <a:ext cx="1748988" cy="384048"/>
-          </a:xfrm>
-          <a:prstGeom prst="rect">
-            <a:avLst/>
-          </a:prstGeom>
-          <a:noFill/>
-          <a:ln/>
-        </p:spPr>
-        <p:txBody>
-          <a:bodyPr wrap="square" lIns="0" tIns="0" rIns="0" bIns="0" rtlCol="0" anchor="ctr"/>
-          <a:lstStyle/>
-          <a:p>
-            <a:pPr indent="0" marL="0">
-              <a:lnSpc>
-                <a:spcPct val="115000"/>
-              </a:lnSpc>
-              <a:buNone/>
-            </a:pPr>
-            <a:r>
-              <a:rPr lang="en-US" sz="800" dirty="0">
-                <a:solidFill>
-                  <a:srgbClr val="1B2740"/>
-                </a:solidFill>
-                <a:latin typeface="Malgun Gothic" pitchFamily="34" charset="0"/>
-                <a:ea typeface="Malgun Gothic" pitchFamily="34" charset="-122"/>
-                <a:cs typeface="Malgun Gothic" pitchFamily="34" charset="-120"/>
-              </a:rPr>
-              <a:t>현궁착용 군인</a:t>
-            </a:r>
-            <a:endParaRPr lang="en-US" sz="800" dirty="0"/>
-          </a:p>
-        </p:txBody>
-      </p:sp>
-      <p:pic>
-        <p:nvPicPr>
-          <p:cNvPr id="25" name="Image 7" descr="preencoded.png">    </p:cNvPr>
-          <p:cNvPicPr>
-            <a:picLocks noChangeAspect="1"/>
-          </p:cNvPicPr>
-          <p:nvPr/>
-        </p:nvPicPr>
-        <p:blipFill>
-          <a:blip r:embed="rId8"/>
-          <a:stretch>
-            <a:fillRect/>
-          </a:stretch>
-        </p:blipFill>
-        <p:spPr>
-          <a:xfrm>
-            <a:off x="7628772" y="3127248"/>
-            <a:ext cx="603504" cy="603504"/>
-          </a:xfrm>
-          <a:prstGeom prst="rect">
-            <a:avLst/>
-          </a:prstGeom>
-        </p:spPr>
-      </p:pic>
-      <p:sp>
-        <p:nvSpPr>
-          <p:cNvPr id="26" name="Text 16"/>
-          <p:cNvSpPr txBox="1"/>
-          <p:nvPr/>
-        </p:nvSpPr>
-        <p:spPr>
-          <a:xfrm>
-            <a:off x="5996330" y="4206240"/>
-            <a:ext cx="1748988" cy="384048"/>
-          </a:xfrm>
-          <a:prstGeom prst="rect">
-            <a:avLst/>
-          </a:prstGeom>
-          <a:noFill/>
-          <a:ln/>
-        </p:spPr>
-        <p:txBody>
-          <a:bodyPr wrap="square" lIns="0" tIns="0" rIns="0" bIns="0" rtlCol="0" anchor="ctr"/>
-          <a:lstStyle/>
-          <a:p>
-            <a:pPr indent="0" marL="0">
-              <a:lnSpc>
-                <a:spcPct val="115000"/>
-              </a:lnSpc>
-              <a:buNone/>
-            </a:pPr>
-            <a:r>
-              <a:rPr lang="en-US" sz="800" dirty="0">
-                <a:solidFill>
-                  <a:srgbClr val="1B2740"/>
-                </a:solidFill>
-                <a:latin typeface="Malgun Gothic" pitchFamily="34" charset="0"/>
-                <a:ea typeface="Malgun Gothic" pitchFamily="34" charset="-122"/>
-                <a:cs typeface="Malgun Gothic" pitchFamily="34" charset="-120"/>
-              </a:rPr>
-              <a:t>중형무인기</a:t>
-            </a:r>
-            <a:endParaRPr lang="en-US" sz="800" dirty="0"/>
-          </a:p>
-        </p:txBody>
-      </p:sp>
-      <p:pic>
-        <p:nvPicPr>
-          <p:cNvPr id="27" name="Image 8" descr="preencoded.png">    </p:cNvPr>
-          <p:cNvPicPr>
-            <a:picLocks noChangeAspect="1"/>
-          </p:cNvPicPr>
-          <p:nvPr/>
-        </p:nvPicPr>
-        <p:blipFill>
-          <a:blip r:embed="rId9"/>
-          <a:stretch>
-            <a:fillRect/>
-          </a:stretch>
-        </p:blipFill>
-        <p:spPr>
-          <a:xfrm>
-            <a:off x="7628772" y="4498848"/>
-            <a:ext cx="603504" cy="603504"/>
-          </a:xfrm>
-          <a:prstGeom prst="rect">
-            <a:avLst/>
-          </a:prstGeom>
-        </p:spPr>
-      </p:pic>
-      <p:sp>
-        <p:nvSpPr>
-          <p:cNvPr id="28" name="Text 17"/>
-          <p:cNvSpPr txBox="1"/>
-          <p:nvPr/>
-        </p:nvSpPr>
-        <p:spPr>
-          <a:xfrm>
-            <a:off x="5996330" y="5577840"/>
-            <a:ext cx="1748988" cy="384048"/>
-          </a:xfrm>
-          <a:prstGeom prst="rect">
-            <a:avLst/>
-          </a:prstGeom>
-          <a:noFill/>
-          <a:ln/>
-        </p:spPr>
-        <p:txBody>
-          <a:bodyPr wrap="square" lIns="0" tIns="0" rIns="0" bIns="0" rtlCol="0" anchor="ctr"/>
-          <a:lstStyle/>
-          <a:p>
-            <a:pPr indent="0" marL="0">
-              <a:lnSpc>
-                <a:spcPct val="115000"/>
-              </a:lnSpc>
-              <a:buNone/>
-            </a:pPr>
-            <a:r>
-              <a:rPr lang="en-US" sz="800" dirty="0">
-                <a:solidFill>
-                  <a:srgbClr val="1B2740"/>
-                </a:solidFill>
-                <a:latin typeface="Malgun Gothic" pitchFamily="34" charset="0"/>
-                <a:ea typeface="Malgun Gothic" pitchFamily="34" charset="-122"/>
-                <a:cs typeface="Malgun Gothic" pitchFamily="34" charset="-120"/>
-              </a:rPr>
-              <a:t>비궁</a:t>
-            </a:r>
-            <a:endParaRPr lang="en-US" sz="800" dirty="0"/>
-          </a:p>
-        </p:txBody>
-      </p:sp>
-      <p:pic>
-        <p:nvPicPr>
-          <p:cNvPr id="29" name="Image 9" descr="preencoded.png">    </p:cNvPr>
-          <p:cNvPicPr>
-            <a:picLocks noChangeAspect="1"/>
-          </p:cNvPicPr>
-          <p:nvPr/>
-        </p:nvPicPr>
-        <p:blipFill>
-          <a:blip r:embed="rId10"/>
-          <a:stretch>
-            <a:fillRect/>
-          </a:stretch>
-        </p:blipFill>
-        <p:spPr>
-          <a:xfrm>
-            <a:off x="7628772" y="5870448"/>
-            <a:ext cx="603504" cy="603504"/>
-          </a:xfrm>
-          <a:prstGeom prst="rect">
-            <a:avLst/>
-          </a:prstGeom>
-        </p:spPr>
-      </p:pic>
-      <p:sp>
-        <p:nvSpPr>
-          <p:cNvPr id="30" name="Text 18"/>
-          <p:cNvSpPr txBox="1"/>
-          <p:nvPr/>
-        </p:nvSpPr>
-        <p:spPr>
-          <a:xfrm>
-            <a:off x="9176309" y="91440"/>
-            <a:ext cx="1748988" cy="384048"/>
-          </a:xfrm>
-          <a:prstGeom prst="rect">
-            <a:avLst/>
-          </a:prstGeom>
-          <a:noFill/>
-          <a:ln/>
-        </p:spPr>
-        <p:txBody>
-          <a:bodyPr wrap="square" lIns="0" tIns="0" rIns="0" bIns="0" rtlCol="0" anchor="ctr"/>
-          <a:lstStyle/>
-          <a:p>
-            <a:pPr indent="0" marL="0">
-              <a:lnSpc>
-                <a:spcPct val="115000"/>
-              </a:lnSpc>
-              <a:buNone/>
-            </a:pPr>
-            <a:r>
-              <a:rPr lang="en-US" sz="800" dirty="0">
-                <a:solidFill>
-                  <a:srgbClr val="1B2740"/>
-                </a:solidFill>
-                <a:latin typeface="Malgun Gothic" pitchFamily="34" charset="0"/>
-                <a:ea typeface="Malgun Gothic" pitchFamily="34" charset="-122"/>
-                <a:cs typeface="Malgun Gothic" pitchFamily="34" charset="-120"/>
-              </a:rPr>
-              <a:t>해룡</a:t>
-            </a:r>
-            <a:endParaRPr lang="en-US" sz="800" dirty="0"/>
-          </a:p>
-        </p:txBody>
-      </p:sp>
-      <p:pic>
-        <p:nvPicPr>
-          <p:cNvPr id="31" name="Image 10" descr="preencoded.png">    </p:cNvPr>
-          <p:cNvPicPr>
-            <a:picLocks noChangeAspect="1"/>
-          </p:cNvPicPr>
-          <p:nvPr/>
-        </p:nvPicPr>
-        <p:blipFill>
-          <a:blip r:embed="rId11"/>
-          <a:stretch>
-            <a:fillRect/>
-          </a:stretch>
-        </p:blipFill>
-        <p:spPr>
-          <a:xfrm>
-            <a:off x="10808751" y="384048"/>
-            <a:ext cx="603504" cy="603504"/>
-          </a:xfrm>
-          <a:prstGeom prst="rect">
-            <a:avLst/>
-          </a:prstGeom>
-        </p:spPr>
-      </p:pic>
-      <p:sp>
-        <p:nvSpPr>
-          <p:cNvPr id="32" name="Text 19"/>
-          <p:cNvSpPr txBox="1"/>
-          <p:nvPr/>
-        </p:nvSpPr>
-        <p:spPr>
-          <a:xfrm>
-            <a:off x="9176309" y="1463040"/>
-            <a:ext cx="1748988" cy="384048"/>
-          </a:xfrm>
-          <a:prstGeom prst="rect">
-            <a:avLst/>
-          </a:prstGeom>
-          <a:noFill/>
-          <a:ln/>
-        </p:spPr>
-        <p:txBody>
-          <a:bodyPr wrap="square" lIns="0" tIns="0" rIns="0" bIns="0" rtlCol="0" anchor="ctr"/>
-          <a:lstStyle/>
-          <a:p>
-            <a:pPr indent="0" marL="0">
-              <a:lnSpc>
-                <a:spcPct val="115000"/>
-              </a:lnSpc>
-              <a:buNone/>
-            </a:pPr>
-            <a:r>
-              <a:rPr lang="en-US" sz="800" dirty="0">
-                <a:solidFill>
-                  <a:srgbClr val="1B2740"/>
-                </a:solidFill>
-                <a:latin typeface="Malgun Gothic" pitchFamily="34" charset="0"/>
-                <a:ea typeface="Malgun Gothic" pitchFamily="34" charset="-122"/>
-                <a:cs typeface="Malgun Gothic" pitchFamily="34" charset="-120"/>
-              </a:rPr>
-              <a:t>장보고Batch III</a:t>
-            </a:r>
-            <a:endParaRPr lang="en-US" sz="800" dirty="0"/>
-          </a:p>
-        </p:txBody>
-      </p:sp>
-      <p:pic>
-        <p:nvPicPr>
-          <p:cNvPr id="33" name="Image 11" descr="preencoded.png">    </p:cNvPr>
-          <p:cNvPicPr>
-            <a:picLocks noChangeAspect="1"/>
-          </p:cNvPicPr>
-          <p:nvPr/>
-        </p:nvPicPr>
-        <p:blipFill>
-          <a:blip r:embed="rId12"/>
-          <a:stretch>
-            <a:fillRect/>
-          </a:stretch>
-        </p:blipFill>
-        <p:spPr>
-          <a:xfrm>
-            <a:off x="10808751" y="1755648"/>
-            <a:ext cx="603504" cy="603504"/>
-          </a:xfrm>
-          <a:prstGeom prst="rect">
-            <a:avLst/>
-          </a:prstGeom>
-        </p:spPr>
-      </p:pic>
-      <p:sp>
-        <p:nvSpPr>
-          <p:cNvPr id="34" name="Text 20"/>
-          <p:cNvSpPr txBox="1"/>
-          <p:nvPr/>
-        </p:nvSpPr>
-        <p:spPr>
-          <a:xfrm>
-            <a:off x="9176309" y="2834640"/>
-            <a:ext cx="1748988" cy="384048"/>
-          </a:xfrm>
-          <a:prstGeom prst="rect">
-            <a:avLst/>
-          </a:prstGeom>
-          <a:noFill/>
-          <a:ln/>
-        </p:spPr>
-        <p:txBody>
-          <a:bodyPr wrap="square" lIns="0" tIns="0" rIns="0" bIns="0" rtlCol="0" anchor="ctr"/>
-          <a:lstStyle/>
-          <a:p>
-            <a:pPr indent="0" marL="0">
-              <a:lnSpc>
-                <a:spcPct val="115000"/>
-              </a:lnSpc>
-              <a:buNone/>
-            </a:pPr>
-            <a:r>
-              <a:rPr lang="en-US" sz="800" dirty="0">
-                <a:solidFill>
-                  <a:srgbClr val="1B2740"/>
-                </a:solidFill>
-                <a:latin typeface="Malgun Gothic" pitchFamily="34" charset="0"/>
-                <a:ea typeface="Malgun Gothic" pitchFamily="34" charset="-122"/>
-                <a:cs typeface="Malgun Gothic" pitchFamily="34" charset="-120"/>
-              </a:rPr>
-              <a:t>초소형 위성</a:t>
-            </a:r>
-            <a:endParaRPr lang="en-US" sz="800" dirty="0"/>
-          </a:p>
-        </p:txBody>
-      </p:sp>
-      <p:pic>
-        <p:nvPicPr>
-          <p:cNvPr id="35" name="Image 12" descr="preencoded.png">    </p:cNvPr>
-          <p:cNvPicPr>
-            <a:picLocks noChangeAspect="1"/>
-          </p:cNvPicPr>
-          <p:nvPr/>
-        </p:nvPicPr>
-        <p:blipFill>
-          <a:blip r:embed="rId13"/>
-          <a:stretch>
-            <a:fillRect/>
-          </a:stretch>
-        </p:blipFill>
-        <p:spPr>
-          <a:xfrm>
-            <a:off x="10808751" y="3127248"/>
-            <a:ext cx="603504" cy="603504"/>
-          </a:xfrm>
-          <a:prstGeom prst="rect">
-            <a:avLst/>
-          </a:prstGeom>
-        </p:spPr>
-      </p:pic>
-      <p:sp>
-        <p:nvSpPr>
-          <p:cNvPr id="36" name="Text 21"/>
-          <p:cNvSpPr txBox="1"/>
-          <p:nvPr/>
-        </p:nvSpPr>
-        <p:spPr>
-          <a:xfrm>
-            <a:off x="9176309" y="4206240"/>
-            <a:ext cx="1748988" cy="384048"/>
-          </a:xfrm>
-          <a:prstGeom prst="rect">
-            <a:avLst/>
-          </a:prstGeom>
-          <a:noFill/>
-          <a:ln/>
-        </p:spPr>
-        <p:txBody>
-          <a:bodyPr wrap="square" lIns="0" tIns="0" rIns="0" bIns="0" rtlCol="0" anchor="ctr"/>
-          <a:lstStyle/>
-          <a:p>
-            <a:pPr indent="0" marL="0">
-              <a:lnSpc>
-                <a:spcPct val="115000"/>
-              </a:lnSpc>
-              <a:buNone/>
-            </a:pPr>
-            <a:r>
-              <a:rPr lang="en-US" sz="800" dirty="0">
-                <a:solidFill>
-                  <a:srgbClr val="1B2740"/>
-                </a:solidFill>
-                <a:latin typeface="Malgun Gothic" pitchFamily="34" charset="0"/>
-                <a:ea typeface="Malgun Gothic" pitchFamily="34" charset="-122"/>
-                <a:cs typeface="Malgun Gothic" pitchFamily="34" charset="-120"/>
-              </a:rPr>
-              <a:t>장거리공대지</a:t>
-            </a:r>
-            <a:endParaRPr lang="en-US" sz="800" dirty="0"/>
-          </a:p>
-          <a:p>
-            <a:pPr indent="0" marL="0">
-              <a:lnSpc>
-                <a:spcPct val="115000"/>
-              </a:lnSpc>
-              <a:buNone/>
-            </a:pPr>
-            <a:r>
-              <a:rPr lang="en-US" sz="800" dirty="0">
-                <a:solidFill>
-                  <a:srgbClr val="1B2740"/>
-                </a:solidFill>
-                <a:latin typeface="Malgun Gothic" pitchFamily="34" charset="0"/>
-                <a:ea typeface="Malgun Gothic" pitchFamily="34" charset="-122"/>
-                <a:cs typeface="Malgun Gothic" pitchFamily="34" charset="-120"/>
-              </a:rPr>
-              <a:t>유도탄</a:t>
-            </a:r>
-            <a:endParaRPr lang="en-US" sz="800" dirty="0"/>
-          </a:p>
-        </p:txBody>
-      </p:sp>
-      <p:pic>
-        <p:nvPicPr>
-          <p:cNvPr id="37" name="Image 13" descr="preencoded.png">    </p:cNvPr>
-          <p:cNvPicPr>
-            <a:picLocks noChangeAspect="1"/>
-          </p:cNvPicPr>
-          <p:nvPr/>
-        </p:nvPicPr>
-        <p:blipFill>
-          <a:blip r:embed="rId14"/>
-          <a:stretch>
-            <a:fillRect/>
-          </a:stretch>
-        </p:blipFill>
-        <p:spPr>
-          <a:xfrm>
-            <a:off x="10808751" y="4498848"/>
-            <a:ext cx="603504" cy="603504"/>
-          </a:xfrm>
-          <a:prstGeom prst="rect">
-            <a:avLst/>
-          </a:prstGeom>
-        </p:spPr>
-      </p:pic>
     </p:spTree>
   </p:cSld>
   <p:clrMapOvr>
@@ -9799,45 +4517,6 @@
       </p:grpSpPr>
       <p:sp>
         <p:nvSpPr>
-          <p:cNvPr id="2" name="Text 0"/>
-          <p:cNvSpPr txBox="1"/>
-          <p:nvPr/>
-        </p:nvSpPr>
-        <p:spPr>
-          <a:xfrm>
-            <a:off x="8229600" y="658368"/>
-            <a:ext cx="3017520" cy="274320"/>
-          </a:xfrm>
-          <a:prstGeom prst="rect">
-            <a:avLst/>
-          </a:prstGeom>
-          <a:noFill/>
-          <a:ln/>
-        </p:spPr>
-        <p:txBody>
-          <a:bodyPr wrap="square" lIns="0" tIns="0" rIns="0" bIns="0" rtlCol="0" anchor="ctr"/>
-          <a:lstStyle/>
-          <a:p>
-            <a:pPr algn="r" indent="0" marL="0">
-              <a:buNone/>
-            </a:pPr>
-            <a:r>
-              <a:rPr lang="en-US" sz="1000" b="1" dirty="0">
-                <a:solidFill>
-                  <a:srgbClr val="FFFFFF"/>
-                </a:solidFill>
-                <a:latin typeface="Malgun Gothic" pitchFamily="34" charset="0"/>
-                <a:ea typeface="Malgun Gothic" pitchFamily="34" charset="-122"/>
-                <a:cs typeface="Malgun Gothic" pitchFamily="34" charset="-120"/>
-              </a:rPr>
-              <a:t>Confidential</a:t>
-            </a:r>
-            <a:endParaRPr lang="en-US" sz="1000" dirty="0"/>
-          </a:p>
-        </p:txBody>
-      </p:sp>
-      <p:sp>
-        <p:nvSpPr>
           <p:cNvPr id="3" name="Text 1"/>
           <p:cNvSpPr txBox="1"/>
           <p:nvPr/>
@@ -10124,7 +4803,7 @@
             <a:pPr algn="ctr" indent="0" marL="0">
               <a:buNone/>
             </a:pPr>
-            <a:r>
+            <a:fld id="{92E57C58-7B62-4F15-9643-760246136E0C}" type="slidenum">
               <a:rPr lang="en-US" sz="850" dirty="0">
                 <a:solidFill>
                   <a:srgbClr val="FFFFFF"/>
@@ -10133,8 +4812,8 @@
                 <a:ea typeface="Malgun Gothic" pitchFamily="34" charset="-122"/>
                 <a:cs typeface="Malgun Gothic" pitchFamily="34" charset="-120"/>
               </a:rPr>
-              <a:t>3</a:t>
-            </a:r>
+              <a:t>2</a:t>
+            </a:fld>
             <a:endParaRPr lang="en-US" sz="850" dirty="0"/>
           </a:p>
         </p:txBody>
@@ -10282,7 +4961,7 @@
             <a:pPr algn="ctr" indent="0" marL="0">
               <a:buNone/>
             </a:pPr>
-            <a:r>
+            <a:fld id="{12B95CB7-7012-4B34-81DC-53674052436A}" type="slidenum">
               <a:rPr lang="en-US" sz="850" dirty="0">
                 <a:solidFill>
                   <a:srgbClr val="8794AC"/>
@@ -10291,8 +4970,8 @@
                 <a:ea typeface="Malgun Gothic" pitchFamily="34" charset="-122"/>
                 <a:cs typeface="Malgun Gothic" pitchFamily="34" charset="-120"/>
               </a:rPr>
-              <a:t>4</a:t>
-            </a:r>
+              <a:t>3</a:t>
+            </a:fld>
             <a:endParaRPr lang="en-US" sz="850" dirty="0"/>
           </a:p>
         </p:txBody>
@@ -11585,7 +6264,7 @@
             <a:pPr algn="ctr" indent="0" marL="0">
               <a:buNone/>
             </a:pPr>
-            <a:r>
+            <a:fld id="{D3340379-462D-4799-A9B6-EA1F9B95D0E3}" type="slidenum">
               <a:rPr lang="en-US" sz="850" dirty="0">
                 <a:solidFill>
                   <a:srgbClr val="8794AC"/>
@@ -11594,8 +6273,8 @@
                 <a:ea typeface="Malgun Gothic" pitchFamily="34" charset="-122"/>
                 <a:cs typeface="Malgun Gothic" pitchFamily="34" charset="-120"/>
               </a:rPr>
-              <a:t>5</a:t>
-            </a:r>
+              <a:t>4</a:t>
+            </a:fld>
             <a:endParaRPr lang="en-US" sz="850" dirty="0"/>
           </a:p>
         </p:txBody>
@@ -11908,7 +6587,7 @@
             <a:pPr algn="ctr" indent="0" marL="0">
               <a:buNone/>
             </a:pPr>
-            <a:r>
+            <a:fld id="{D18EF3BD-9E47-4C83-9E2B-FA95276CE143}" type="slidenum">
               <a:rPr lang="en-US" sz="850" dirty="0">
                 <a:solidFill>
                   <a:srgbClr val="8794AC"/>
@@ -11917,8 +6596,8 @@
                 <a:ea typeface="Malgun Gothic" pitchFamily="34" charset="-122"/>
                 <a:cs typeface="Malgun Gothic" pitchFamily="34" charset="-120"/>
               </a:rPr>
-              <a:t>6</a:t>
-            </a:r>
+              <a:t>5</a:t>
+            </a:fld>
             <a:endParaRPr lang="en-US" sz="850" dirty="0"/>
           </a:p>
         </p:txBody>
@@ -12130,7 +6809,7 @@
             <a:pPr algn="ctr" indent="0" marL="0">
               <a:buNone/>
             </a:pPr>
-            <a:r>
+            <a:fld id="{A444486E-5959-4955-A584-5E16815DB419}" type="slidenum">
               <a:rPr lang="en-US" sz="850" dirty="0">
                 <a:solidFill>
                   <a:srgbClr val="8794AC"/>
@@ -12139,8 +6818,8 @@
                 <a:ea typeface="Malgun Gothic" pitchFamily="34" charset="-122"/>
                 <a:cs typeface="Malgun Gothic" pitchFamily="34" charset="-120"/>
               </a:rPr>
-              <a:t>7</a:t>
-            </a:r>
+              <a:t>6</a:t>
+            </a:fld>
             <a:endParaRPr lang="en-US" sz="850" dirty="0"/>
           </a:p>
         </p:txBody>
@@ -12567,7 +7246,7 @@
             <a:pPr algn="ctr" indent="0" marL="0">
               <a:buNone/>
             </a:pPr>
-            <a:r>
+            <a:fld id="{2305D3F6-085D-4E25-948A-FEBD737B7625}" type="slidenum">
               <a:rPr lang="en-US" sz="850" dirty="0">
                 <a:solidFill>
                   <a:srgbClr val="8794AC"/>
@@ -12576,8 +7255,8 @@
                 <a:ea typeface="Malgun Gothic" pitchFamily="34" charset="-122"/>
                 <a:cs typeface="Malgun Gothic" pitchFamily="34" charset="-120"/>
               </a:rPr>
-              <a:t>8</a:t>
-            </a:r>
+              <a:t>7</a:t>
+            </a:fld>
             <a:endParaRPr lang="en-US" sz="850" dirty="0"/>
           </a:p>
         </p:txBody>
@@ -13181,7 +7860,7 @@
             <a:pPr algn="ctr" indent="0" marL="0">
               <a:buNone/>
             </a:pPr>
-            <a:r>
+            <a:fld id="{2898F98A-EBF8-4ABE-9EAC-128D145901C6}" type="slidenum">
               <a:rPr lang="en-US" sz="850" dirty="0">
                 <a:solidFill>
                   <a:srgbClr val="8794AC"/>
@@ -13190,8 +7869,8 @@
                 <a:ea typeface="Malgun Gothic" pitchFamily="34" charset="-122"/>
                 <a:cs typeface="Malgun Gothic" pitchFamily="34" charset="-120"/>
               </a:rPr>
-              <a:t>9</a:t>
-            </a:r>
+              <a:t>8</a:t>
+            </a:fld>
             <a:endParaRPr lang="en-US" sz="850" dirty="0"/>
           </a:p>
         </p:txBody>
